--- a/lab1/lab1.pptx
+++ b/lab1/lab1.pptx
@@ -5,26 +5,27 @@
     <p:sldMasterId id="2147483648" r:id="rId1"/>
   </p:sldMasterIdLst>
   <p:notesMasterIdLst>
-    <p:notesMasterId r:id="rId19"/>
+    <p:notesMasterId r:id="rId20"/>
   </p:notesMasterIdLst>
   <p:sldIdLst>
     <p:sldId id="256" r:id="rId2"/>
-    <p:sldId id="258" r:id="rId3"/>
-    <p:sldId id="261" r:id="rId4"/>
-    <p:sldId id="262" r:id="rId5"/>
-    <p:sldId id="263" r:id="rId6"/>
-    <p:sldId id="264" r:id="rId7"/>
-    <p:sldId id="265" r:id="rId8"/>
-    <p:sldId id="266" r:id="rId9"/>
-    <p:sldId id="267" r:id="rId10"/>
-    <p:sldId id="268" r:id="rId11"/>
-    <p:sldId id="269" r:id="rId12"/>
-    <p:sldId id="270" r:id="rId13"/>
-    <p:sldId id="271" r:id="rId14"/>
-    <p:sldId id="272" r:id="rId15"/>
-    <p:sldId id="273" r:id="rId16"/>
-    <p:sldId id="274" r:id="rId17"/>
-    <p:sldId id="275" r:id="rId18"/>
+    <p:sldId id="276" r:id="rId3"/>
+    <p:sldId id="258" r:id="rId4"/>
+    <p:sldId id="261" r:id="rId5"/>
+    <p:sldId id="262" r:id="rId6"/>
+    <p:sldId id="263" r:id="rId7"/>
+    <p:sldId id="264" r:id="rId8"/>
+    <p:sldId id="265" r:id="rId9"/>
+    <p:sldId id="266" r:id="rId10"/>
+    <p:sldId id="267" r:id="rId11"/>
+    <p:sldId id="268" r:id="rId12"/>
+    <p:sldId id="269" r:id="rId13"/>
+    <p:sldId id="270" r:id="rId14"/>
+    <p:sldId id="271" r:id="rId15"/>
+    <p:sldId id="272" r:id="rId16"/>
+    <p:sldId id="273" r:id="rId17"/>
+    <p:sldId id="274" r:id="rId18"/>
+    <p:sldId id="275" r:id="rId19"/>
   </p:sldIdLst>
   <p:sldSz cx="12192000" cy="6858000"/>
   <p:notesSz cx="6858000" cy="9144000"/>
@@ -142,6 +143,11 @@
           </p15:clr>
         </p15:guide>
         <p15:guide id="4" pos="6720" userDrawn="1">
+          <p15:clr>
+            <a:srgbClr val="A4A3A4"/>
+          </p15:clr>
+        </p15:guide>
+        <p15:guide id="5" pos="3840" userDrawn="1">
           <p15:clr>
             <a:srgbClr val="A4A3A4"/>
           </p15:clr>
@@ -4034,10 +4040,10 @@
       </p:sp>
       <p:pic>
         <p:nvPicPr>
-          <p:cNvPr id="11" name="Рисунок 10">
-            <a:extLst>
-              <a:ext uri="{FF2B5EF4-FFF2-40B4-BE49-F238E27FC236}">
-                <a16:creationId xmlns:a16="http://schemas.microsoft.com/office/drawing/2014/main" id="{168F4517-3BA1-84B9-B301-FB76E61E6A7E}"/>
+          <p:cNvPr id="9" name="Рисунок 8">
+            <a:extLst>
+              <a:ext uri="{FF2B5EF4-FFF2-40B4-BE49-F238E27FC236}">
+                <a16:creationId xmlns:a16="http://schemas.microsoft.com/office/drawing/2014/main" id="{A8DB5022-9FD0-6730-BB27-D222EF11023E}"/>
               </a:ext>
             </a:extLst>
           </p:cNvPr>
@@ -4048,55 +4054,55 @@
         </p:nvPicPr>
         <p:blipFill>
           <a:blip r:embed="rId2"/>
-          <a:srcRect l="34723" t="79" r="34723" b="-79"/>
-          <a:stretch/>
-        </p:blipFill>
-        <p:spPr>
-          <a:xfrm>
-            <a:off x="6095999" y="3070225"/>
-            <a:ext cx="4571999" cy="3238500"/>
-          </a:xfrm>
-          <a:prstGeom prst="rect">
-            <a:avLst/>
-          </a:prstGeom>
-        </p:spPr>
-      </p:pic>
-      <p:pic>
-        <p:nvPicPr>
-          <p:cNvPr id="3" name="Рисунок 2">
-            <a:extLst>
-              <a:ext uri="{FF2B5EF4-FFF2-40B4-BE49-F238E27FC236}">
-                <a16:creationId xmlns:a16="http://schemas.microsoft.com/office/drawing/2014/main" id="{613A03B6-2295-028A-19DF-D6D5CC917FDA}"/>
-              </a:ext>
-            </a:extLst>
-          </p:cNvPr>
-          <p:cNvPicPr>
-            <a:picLocks noChangeAspect="1"/>
-          </p:cNvPicPr>
-          <p:nvPr/>
-        </p:nvPicPr>
-        <p:blipFill>
-          <a:blip r:embed="rId3"/>
           <a:stretch>
             <a:fillRect/>
           </a:stretch>
         </p:blipFill>
         <p:spPr>
           <a:xfrm>
-            <a:off x="1493321" y="3070225"/>
-            <a:ext cx="4203831" cy="3238500"/>
+            <a:off x="1485897" y="3070225"/>
+            <a:ext cx="4211255" cy="3238500"/>
           </a:xfrm>
           <a:prstGeom prst="rect">
             <a:avLst/>
           </a:prstGeom>
         </p:spPr>
       </p:pic>
-      <p:sp>
-        <p:nvSpPr>
-          <p:cNvPr id="4" name="Номер слайда 3">
-            <a:extLst>
-              <a:ext uri="{FF2B5EF4-FFF2-40B4-BE49-F238E27FC236}">
-                <a16:creationId xmlns:a16="http://schemas.microsoft.com/office/drawing/2014/main" id="{53467423-826C-36D0-76F5-5DE7BFA0D462}"/>
+      <p:pic>
+        <p:nvPicPr>
+          <p:cNvPr id="11" name="Рисунок 10">
+            <a:extLst>
+              <a:ext uri="{FF2B5EF4-FFF2-40B4-BE49-F238E27FC236}">
+                <a16:creationId xmlns:a16="http://schemas.microsoft.com/office/drawing/2014/main" id="{168F4517-3BA1-84B9-B301-FB76E61E6A7E}"/>
+              </a:ext>
+            </a:extLst>
+          </p:cNvPr>
+          <p:cNvPicPr>
+            <a:picLocks noChangeAspect="1"/>
+          </p:cNvPicPr>
+          <p:nvPr/>
+        </p:nvPicPr>
+        <p:blipFill>
+          <a:blip r:embed="rId3"/>
+          <a:srcRect r="69447"/>
+          <a:stretch/>
+        </p:blipFill>
+        <p:spPr>
+          <a:xfrm>
+            <a:off x="6095999" y="3070225"/>
+            <a:ext cx="4571999" cy="3238500"/>
+          </a:xfrm>
+          <a:prstGeom prst="rect">
+            <a:avLst/>
+          </a:prstGeom>
+        </p:spPr>
+      </p:pic>
+      <p:sp>
+        <p:nvSpPr>
+          <p:cNvPr id="12" name="Номер слайда 11">
+            <a:extLst>
+              <a:ext uri="{FF2B5EF4-FFF2-40B4-BE49-F238E27FC236}">
+                <a16:creationId xmlns:a16="http://schemas.microsoft.com/office/drawing/2014/main" id="{F336EB0A-49A1-F94D-4617-C84D35BD1741}"/>
               </a:ext>
             </a:extLst>
           </p:cNvPr>
@@ -4122,25 +4128,13 @@
     </p:spTree>
     <p:extLst>
       <p:ext uri="{BB962C8B-B14F-4D97-AF65-F5344CB8AC3E}">
-        <p14:creationId xmlns:p14="http://schemas.microsoft.com/office/powerpoint/2010/main" val="2966589138"/>
+        <p14:creationId xmlns:p14="http://schemas.microsoft.com/office/powerpoint/2010/main" val="3037962077"/>
       </p:ext>
     </p:extLst>
   </p:cSld>
   <p:clrMapOvr>
     <a:masterClrMapping/>
   </p:clrMapOvr>
-  <mc:AlternateContent xmlns:mc="http://schemas.openxmlformats.org/markup-compatibility/2006">
-    <mc:Choice xmlns:p14="http://schemas.microsoft.com/office/powerpoint/2010/main" Requires="p14">
-      <p:transition spd="med" p14:dur="700">
-        <p:fade/>
-      </p:transition>
-    </mc:Choice>
-    <mc:Fallback>
-      <p:transition spd="med">
-        <p:fade/>
-      </p:transition>
-    </mc:Fallback>
-  </mc:AlternateContent>
 </p:sld>
 </file>
 
@@ -4321,7 +4315,7 @@
         </p:nvPicPr>
         <p:blipFill>
           <a:blip r:embed="rId2"/>
-          <a:srcRect l="69446"/>
+          <a:srcRect l="34723" t="79" r="34723" b="-79"/>
           <a:stretch/>
         </p:blipFill>
         <p:spPr>
@@ -4336,10 +4330,10 @@
       </p:pic>
       <p:pic>
         <p:nvPicPr>
-          <p:cNvPr id="4" name="Рисунок 3">
-            <a:extLst>
-              <a:ext uri="{FF2B5EF4-FFF2-40B4-BE49-F238E27FC236}">
-                <a16:creationId xmlns:a16="http://schemas.microsoft.com/office/drawing/2014/main" id="{9E79B09B-306E-F2DA-8344-CADE2E62BA94}"/>
+          <p:cNvPr id="3" name="Рисунок 2">
+            <a:extLst>
+              <a:ext uri="{FF2B5EF4-FFF2-40B4-BE49-F238E27FC236}">
+                <a16:creationId xmlns:a16="http://schemas.microsoft.com/office/drawing/2014/main" id="{613A03B6-2295-028A-19DF-D6D5CC917FDA}"/>
               </a:ext>
             </a:extLst>
           </p:cNvPr>
@@ -4356,8 +4350,8 @@
         </p:blipFill>
         <p:spPr>
           <a:xfrm>
-            <a:off x="1485897" y="3070225"/>
-            <a:ext cx="4211255" cy="3238500"/>
+            <a:off x="1493321" y="3070225"/>
+            <a:ext cx="4203831" cy="3238500"/>
           </a:xfrm>
           <a:prstGeom prst="rect">
             <a:avLst/>
@@ -4366,10 +4360,10 @@
       </p:pic>
       <p:sp>
         <p:nvSpPr>
-          <p:cNvPr id="6" name="Номер слайда 5">
-            <a:extLst>
-              <a:ext uri="{FF2B5EF4-FFF2-40B4-BE49-F238E27FC236}">
-                <a16:creationId xmlns:a16="http://schemas.microsoft.com/office/drawing/2014/main" id="{13C290A2-9444-B917-EDC3-1E0F8E8CF29D}"/>
+          <p:cNvPr id="4" name="Номер слайда 3">
+            <a:extLst>
+              <a:ext uri="{FF2B5EF4-FFF2-40B4-BE49-F238E27FC236}">
+                <a16:creationId xmlns:a16="http://schemas.microsoft.com/office/drawing/2014/main" id="{53467423-826C-36D0-76F5-5DE7BFA0D462}"/>
               </a:ext>
             </a:extLst>
           </p:cNvPr>
@@ -4395,20 +4389,20 @@
     </p:spTree>
     <p:extLst>
       <p:ext uri="{BB962C8B-B14F-4D97-AF65-F5344CB8AC3E}">
-        <p14:creationId xmlns:p14="http://schemas.microsoft.com/office/powerpoint/2010/main" val="956397767"/>
+        <p14:creationId xmlns:p14="http://schemas.microsoft.com/office/powerpoint/2010/main" val="2966589138"/>
       </p:ext>
     </p:extLst>
   </p:cSld>
   <p:clrMapOvr>
     <a:masterClrMapping/>
   </p:clrMapOvr>
-  <mc:AlternateContent xmlns:mc="http://schemas.openxmlformats.org/markup-compatibility/2006">
-    <mc:Choice xmlns:p14="http://schemas.microsoft.com/office/powerpoint/2010/main" Requires="p14">
+  <mc:AlternateContent xmlns:mc="http://schemas.openxmlformats.org/markup-compatibility/2006" xmlns:p14="http://schemas.microsoft.com/office/powerpoint/2010/main">
+    <mc:Choice Requires="p14">
       <p:transition spd="med" p14:dur="700">
         <p:fade/>
       </p:transition>
     </mc:Choice>
-    <mc:Fallback>
+    <mc:Fallback xmlns="">
       <p:transition spd="med">
         <p:fade/>
       </p:transition>
@@ -4448,8 +4442,8 @@
         </p:nvSpPr>
         <p:spPr>
           <a:xfrm>
-            <a:off x="1504949" y="549275"/>
-            <a:ext cx="9163052" cy="523220"/>
+            <a:off x="1485899" y="549275"/>
+            <a:ext cx="9182101" cy="954107"/>
           </a:xfrm>
           <a:prstGeom prst="rect">
             <a:avLst/>
@@ -4466,17 +4460,17 @@
               <a:rPr lang="ru-RU" sz="2800" b="1" dirty="0">
                 <a:latin typeface="+mj-lt"/>
               </a:rPr>
-              <a:t>Задание 7. Обрезать изображение и сохранить</a:t>
-            </a:r>
-          </a:p>
-        </p:txBody>
-      </p:sp>
-      <p:sp>
-        <p:nvSpPr>
-          <p:cNvPr id="21" name="TextBox 20">
-            <a:extLst>
-              <a:ext uri="{FF2B5EF4-FFF2-40B4-BE49-F238E27FC236}">
-                <a16:creationId xmlns:a16="http://schemas.microsoft.com/office/drawing/2014/main" id="{0C569071-A5F8-E7C9-1DC2-DF3EA9F88597}"/>
+              <a:t>Задание 6. Отразить изображение по горизонтали, по вертикали и по обеим осям сразу</a:t>
+            </a:r>
+          </a:p>
+        </p:txBody>
+      </p:sp>
+      <p:sp>
+        <p:nvSpPr>
+          <p:cNvPr id="20" name="TextBox 19">
+            <a:extLst>
+              <a:ext uri="{FF2B5EF4-FFF2-40B4-BE49-F238E27FC236}">
+                <a16:creationId xmlns:a16="http://schemas.microsoft.com/office/drawing/2014/main" id="{71F5B869-FCA3-91D3-678D-F5E5BE3D9772}"/>
               </a:ext>
             </a:extLst>
           </p:cNvPr>
@@ -4485,8 +4479,8 @@
         </p:nvSpPr>
         <p:spPr>
           <a:xfrm>
-            <a:off x="1493321" y="2700893"/>
-            <a:ext cx="4203831" cy="369332"/>
+            <a:off x="1485897" y="1594306"/>
+            <a:ext cx="9182101" cy="1015663"/>
           </a:xfrm>
           <a:prstGeom prst="rect">
             <a:avLst/>
@@ -4499,20 +4493,19 @@
           </a:bodyPr>
           <a:lstStyle/>
           <a:p>
-            <a:pPr algn="ctr"/>
-            <a:r>
-              <a:rPr lang="ru-RU" b="1" dirty="0"/>
-              <a:t>Код:</a:t>
-            </a:r>
-          </a:p>
-        </p:txBody>
-      </p:sp>
-      <p:sp>
-        <p:nvSpPr>
-          <p:cNvPr id="28" name="TextBox 27">
-            <a:extLst>
-              <a:ext uri="{FF2B5EF4-FFF2-40B4-BE49-F238E27FC236}">
-                <a16:creationId xmlns:a16="http://schemas.microsoft.com/office/drawing/2014/main" id="{7652C659-39B1-B693-6C90-EC889EECEA23}"/>
+            <a:r>
+              <a:rPr lang="ru-RU" sz="2000" dirty="0"/>
+              <a:t>Суть задания: зеркальный переворот картинки в разные стороны (вверх ногами, слева направо и наискосок) с помощью изменения порядка строк и столбцов</a:t>
+            </a:r>
+          </a:p>
+        </p:txBody>
+      </p:sp>
+      <p:sp>
+        <p:nvSpPr>
+          <p:cNvPr id="21" name="TextBox 20">
+            <a:extLst>
+              <a:ext uri="{FF2B5EF4-FFF2-40B4-BE49-F238E27FC236}">
+                <a16:creationId xmlns:a16="http://schemas.microsoft.com/office/drawing/2014/main" id="{0C569071-A5F8-E7C9-1DC2-DF3EA9F88597}"/>
               </a:ext>
             </a:extLst>
           </p:cNvPr>
@@ -4521,8 +4514,8 @@
         </p:nvSpPr>
         <p:spPr>
           <a:xfrm>
-            <a:off x="6095999" y="2700893"/>
-            <a:ext cx="4572001" cy="369332"/>
+            <a:off x="1493321" y="2700893"/>
+            <a:ext cx="4203831" cy="369332"/>
           </a:xfrm>
           <a:prstGeom prst="rect">
             <a:avLst/>
@@ -4538,6 +4531,42 @@
             <a:pPr algn="ctr"/>
             <a:r>
               <a:rPr lang="ru-RU" b="1" dirty="0"/>
+              <a:t>Код:</a:t>
+            </a:r>
+          </a:p>
+        </p:txBody>
+      </p:sp>
+      <p:sp>
+        <p:nvSpPr>
+          <p:cNvPr id="28" name="TextBox 27">
+            <a:extLst>
+              <a:ext uri="{FF2B5EF4-FFF2-40B4-BE49-F238E27FC236}">
+                <a16:creationId xmlns:a16="http://schemas.microsoft.com/office/drawing/2014/main" id="{7652C659-39B1-B693-6C90-EC889EECEA23}"/>
+              </a:ext>
+            </a:extLst>
+          </p:cNvPr>
+          <p:cNvSpPr txBox="1"/>
+          <p:nvPr/>
+        </p:nvSpPr>
+        <p:spPr>
+          <a:xfrm>
+            <a:off x="6095999" y="2700893"/>
+            <a:ext cx="4572001" cy="369332"/>
+          </a:xfrm>
+          <a:prstGeom prst="rect">
+            <a:avLst/>
+          </a:prstGeom>
+          <a:noFill/>
+        </p:spPr>
+        <p:txBody>
+          <a:bodyPr wrap="square" rtlCol="0" anchor="ctr">
+            <a:spAutoFit/>
+          </a:bodyPr>
+          <a:lstStyle/>
+          <a:p>
+            <a:pPr algn="ctr"/>
+            <a:r>
+              <a:rPr lang="ru-RU" b="1" dirty="0"/>
               <a:t>Вывод:</a:t>
             </a:r>
           </a:p>
@@ -4545,10 +4574,10 @@
       </p:sp>
       <p:pic>
         <p:nvPicPr>
-          <p:cNvPr id="6" name="Рисунок 5">
-            <a:extLst>
-              <a:ext uri="{FF2B5EF4-FFF2-40B4-BE49-F238E27FC236}">
-                <a16:creationId xmlns:a16="http://schemas.microsoft.com/office/drawing/2014/main" id="{98410A0E-D7A6-8BAB-6529-91DD7D536B33}"/>
+          <p:cNvPr id="11" name="Рисунок 10">
+            <a:extLst>
+              <a:ext uri="{FF2B5EF4-FFF2-40B4-BE49-F238E27FC236}">
+                <a16:creationId xmlns:a16="http://schemas.microsoft.com/office/drawing/2014/main" id="{168F4517-3BA1-84B9-B301-FB76E61E6A7E}"/>
               </a:ext>
             </a:extLst>
           </p:cNvPr>
@@ -4559,62 +4588,25 @@
         </p:nvPicPr>
         <p:blipFill>
           <a:blip r:embed="rId2"/>
-          <a:stretch>
-            <a:fillRect/>
-          </a:stretch>
+          <a:srcRect l="69446"/>
+          <a:stretch/>
         </p:blipFill>
         <p:spPr>
           <a:xfrm>
-            <a:off x="1493322" y="3070224"/>
-            <a:ext cx="4203830" cy="1970088"/>
+            <a:off x="6095999" y="3070225"/>
+            <a:ext cx="4571999" cy="3238500"/>
           </a:xfrm>
           <a:prstGeom prst="rect">
             <a:avLst/>
           </a:prstGeom>
         </p:spPr>
       </p:pic>
-      <p:sp>
-        <p:nvSpPr>
-          <p:cNvPr id="7" name="TextBox 6">
-            <a:extLst>
-              <a:ext uri="{FF2B5EF4-FFF2-40B4-BE49-F238E27FC236}">
-                <a16:creationId xmlns:a16="http://schemas.microsoft.com/office/drawing/2014/main" id="{4C213034-1DB3-6960-E018-AC3149DB9E86}"/>
-              </a:ext>
-            </a:extLst>
-          </p:cNvPr>
-          <p:cNvSpPr txBox="1"/>
-          <p:nvPr/>
-        </p:nvSpPr>
-        <p:spPr>
-          <a:xfrm>
-            <a:off x="1493322" y="5040312"/>
-            <a:ext cx="4187494" cy="369332"/>
-          </a:xfrm>
-          <a:prstGeom prst="rect">
-            <a:avLst/>
-          </a:prstGeom>
-          <a:noFill/>
-        </p:spPr>
-        <p:txBody>
-          <a:bodyPr wrap="square" rtlCol="0" anchor="ctr">
-            <a:spAutoFit/>
-          </a:bodyPr>
-          <a:lstStyle/>
-          <a:p>
-            <a:pPr algn="ctr"/>
-            <a:r>
-              <a:rPr lang="ru-RU" b="1" dirty="0"/>
-              <a:t>Терминал:</a:t>
-            </a:r>
-          </a:p>
-        </p:txBody>
-      </p:sp>
       <p:pic>
         <p:nvPicPr>
-          <p:cNvPr id="11" name="Рисунок 10">
-            <a:extLst>
-              <a:ext uri="{FF2B5EF4-FFF2-40B4-BE49-F238E27FC236}">
-                <a16:creationId xmlns:a16="http://schemas.microsoft.com/office/drawing/2014/main" id="{22E6C211-DA84-9E6B-04F1-44E27FC06246}"/>
+          <p:cNvPr id="4" name="Рисунок 3">
+            <a:extLst>
+              <a:ext uri="{FF2B5EF4-FFF2-40B4-BE49-F238E27FC236}">
+                <a16:creationId xmlns:a16="http://schemas.microsoft.com/office/drawing/2014/main" id="{9E79B09B-306E-F2DA-8344-CADE2E62BA94}"/>
               </a:ext>
             </a:extLst>
           </p:cNvPr>
@@ -4631,8 +4623,8 @@
         </p:blipFill>
         <p:spPr>
           <a:xfrm>
-            <a:off x="1493321" y="5409644"/>
-            <a:ext cx="4187495" cy="899081"/>
+            <a:off x="1485897" y="3070225"/>
+            <a:ext cx="4211255" cy="3238500"/>
           </a:xfrm>
           <a:prstGeom prst="rect">
             <a:avLst/>
@@ -4641,104 +4633,10 @@
       </p:pic>
       <p:sp>
         <p:nvSpPr>
-          <p:cNvPr id="14" name="TextBox 13">
-            <a:extLst>
-              <a:ext uri="{FF2B5EF4-FFF2-40B4-BE49-F238E27FC236}">
-                <a16:creationId xmlns:a16="http://schemas.microsoft.com/office/drawing/2014/main" id="{F614B7D0-F4C8-26B0-FCDA-B0777CECB6AB}"/>
-              </a:ext>
-            </a:extLst>
-          </p:cNvPr>
-          <p:cNvSpPr txBox="1"/>
-          <p:nvPr/>
-        </p:nvSpPr>
-        <p:spPr>
-          <a:xfrm>
-            <a:off x="1485897" y="1534318"/>
-            <a:ext cx="9182101" cy="707886"/>
-          </a:xfrm>
-          <a:prstGeom prst="rect">
-            <a:avLst/>
-          </a:prstGeom>
-          <a:noFill/>
-        </p:spPr>
-        <p:txBody>
-          <a:bodyPr wrap="square" rtlCol="0" anchor="ctr">
-            <a:spAutoFit/>
-          </a:bodyPr>
-          <a:lstStyle/>
-          <a:p>
-            <a:r>
-              <a:rPr lang="ru-RU" sz="2000" dirty="0"/>
-              <a:t>Суть задания: извлечение нужного фрагмента изображения для фокусировки на отдельной части кадра</a:t>
-            </a:r>
-          </a:p>
-        </p:txBody>
-      </p:sp>
-      <p:pic>
-        <p:nvPicPr>
-          <p:cNvPr id="18" name="Рисунок 17">
-            <a:extLst>
-              <a:ext uri="{FF2B5EF4-FFF2-40B4-BE49-F238E27FC236}">
-                <a16:creationId xmlns:a16="http://schemas.microsoft.com/office/drawing/2014/main" id="{42F7ED1A-8EA9-9AB2-2D6E-98300EA7F087}"/>
-              </a:ext>
-            </a:extLst>
-          </p:cNvPr>
-          <p:cNvPicPr>
-            <a:picLocks noChangeAspect="1"/>
-          </p:cNvPicPr>
-          <p:nvPr/>
-        </p:nvPicPr>
-        <p:blipFill>
-          <a:blip r:embed="rId4"/>
-          <a:stretch>
-            <a:fillRect/>
-          </a:stretch>
-        </p:blipFill>
-        <p:spPr>
-          <a:xfrm>
-            <a:off x="6096000" y="3070224"/>
-            <a:ext cx="3103026" cy="3238501"/>
-          </a:xfrm>
-          <a:prstGeom prst="rect">
-            <a:avLst/>
-          </a:prstGeom>
-        </p:spPr>
-      </p:pic>
-      <p:pic>
-        <p:nvPicPr>
-          <p:cNvPr id="22" name="Рисунок 21">
-            <a:extLst>
-              <a:ext uri="{FF2B5EF4-FFF2-40B4-BE49-F238E27FC236}">
-                <a16:creationId xmlns:a16="http://schemas.microsoft.com/office/drawing/2014/main" id="{5B06067F-6127-6939-88C1-09AF687F185A}"/>
-              </a:ext>
-            </a:extLst>
-          </p:cNvPr>
-          <p:cNvPicPr>
-            <a:picLocks noChangeAspect="1"/>
-          </p:cNvPicPr>
-          <p:nvPr/>
-        </p:nvPicPr>
-        <p:blipFill>
-          <a:blip r:embed="rId5"/>
-          <a:srcRect r="43595" b="43595"/>
-          <a:stretch/>
-        </p:blipFill>
-        <p:spPr>
-          <a:xfrm>
-            <a:off x="9288779" y="3070224"/>
-            <a:ext cx="1379219" cy="3238501"/>
-          </a:xfrm>
-          <a:prstGeom prst="rect">
-            <a:avLst/>
-          </a:prstGeom>
-        </p:spPr>
-      </p:pic>
-      <p:sp>
-        <p:nvSpPr>
-          <p:cNvPr id="23" name="Номер слайда 22">
-            <a:extLst>
-              <a:ext uri="{FF2B5EF4-FFF2-40B4-BE49-F238E27FC236}">
-                <a16:creationId xmlns:a16="http://schemas.microsoft.com/office/drawing/2014/main" id="{A27B3D08-9886-BA57-671E-FC3A23A83CF9}"/>
+          <p:cNvPr id="6" name="Номер слайда 5">
+            <a:extLst>
+              <a:ext uri="{FF2B5EF4-FFF2-40B4-BE49-F238E27FC236}">
+                <a16:creationId xmlns:a16="http://schemas.microsoft.com/office/drawing/2014/main" id="{13C290A2-9444-B917-EDC3-1E0F8E8CF29D}"/>
               </a:ext>
             </a:extLst>
           </p:cNvPr>
@@ -4756,7 +4654,7 @@
           <a:p>
             <a:r>
               <a:rPr lang="ru-RU" dirty="0"/>
-              <a:t>8</a:t>
+              <a:t>7</a:t>
             </a:r>
           </a:p>
         </p:txBody>
@@ -4764,13 +4662,25 @@
     </p:spTree>
     <p:extLst>
       <p:ext uri="{BB962C8B-B14F-4D97-AF65-F5344CB8AC3E}">
-        <p14:creationId xmlns:p14="http://schemas.microsoft.com/office/powerpoint/2010/main" val="1968421665"/>
+        <p14:creationId xmlns:p14="http://schemas.microsoft.com/office/powerpoint/2010/main" val="956397767"/>
       </p:ext>
     </p:extLst>
   </p:cSld>
   <p:clrMapOvr>
     <a:masterClrMapping/>
   </p:clrMapOvr>
+  <mc:AlternateContent xmlns:mc="http://schemas.openxmlformats.org/markup-compatibility/2006" xmlns:p14="http://schemas.microsoft.com/office/powerpoint/2010/main">
+    <mc:Choice Requires="p14">
+      <p:transition spd="med" p14:dur="700">
+        <p:fade/>
+      </p:transition>
+    </mc:Choice>
+    <mc:Fallback xmlns="">
+      <p:transition spd="med">
+        <p:fade/>
+      </p:transition>
+    </mc:Fallback>
+  </mc:AlternateContent>
 </p:sld>
 </file>
 
@@ -4805,8 +4715,8 @@
         </p:nvSpPr>
         <p:spPr>
           <a:xfrm>
-            <a:off x="1485896" y="557530"/>
-            <a:ext cx="9182101" cy="523220"/>
+            <a:off x="1504949" y="549275"/>
+            <a:ext cx="9163052" cy="523220"/>
           </a:xfrm>
           <a:prstGeom prst="rect">
             <a:avLst/>
@@ -4823,17 +4733,17 @@
               <a:rPr lang="ru-RU" sz="2800" b="1" dirty="0">
                 <a:latin typeface="+mj-lt"/>
               </a:rPr>
-              <a:t>Задание 8. Удалить один цветовой канал</a:t>
-            </a:r>
-          </a:p>
-        </p:txBody>
-      </p:sp>
-      <p:sp>
-        <p:nvSpPr>
-          <p:cNvPr id="20" name="TextBox 19">
-            <a:extLst>
-              <a:ext uri="{FF2B5EF4-FFF2-40B4-BE49-F238E27FC236}">
-                <a16:creationId xmlns:a16="http://schemas.microsoft.com/office/drawing/2014/main" id="{71F5B869-FCA3-91D3-678D-F5E5BE3D9772}"/>
+              <a:t>Задание 7. Обрезать изображение и сохранить</a:t>
+            </a:r>
+          </a:p>
+        </p:txBody>
+      </p:sp>
+      <p:sp>
+        <p:nvSpPr>
+          <p:cNvPr id="21" name="TextBox 20">
+            <a:extLst>
+              <a:ext uri="{FF2B5EF4-FFF2-40B4-BE49-F238E27FC236}">
+                <a16:creationId xmlns:a16="http://schemas.microsoft.com/office/drawing/2014/main" id="{0C569071-A5F8-E7C9-1DC2-DF3EA9F88597}"/>
               </a:ext>
             </a:extLst>
           </p:cNvPr>
@@ -4842,8 +4752,8 @@
         </p:nvSpPr>
         <p:spPr>
           <a:xfrm>
-            <a:off x="1485895" y="1536878"/>
-            <a:ext cx="9182101" cy="707886"/>
+            <a:off x="1493321" y="2700893"/>
+            <a:ext cx="4203831" cy="369332"/>
           </a:xfrm>
           <a:prstGeom prst="rect">
             <a:avLst/>
@@ -4856,19 +4766,20 @@
           </a:bodyPr>
           <a:lstStyle/>
           <a:p>
-            <a:r>
-              <a:rPr lang="ru-RU" sz="2000" dirty="0"/>
-              <a:t>Суть задания: изоляция и обнуление данных одного из каналов для цветокоррекции/тонирования.</a:t>
-            </a:r>
-          </a:p>
-        </p:txBody>
-      </p:sp>
-      <p:sp>
-        <p:nvSpPr>
-          <p:cNvPr id="21" name="TextBox 20">
-            <a:extLst>
-              <a:ext uri="{FF2B5EF4-FFF2-40B4-BE49-F238E27FC236}">
-                <a16:creationId xmlns:a16="http://schemas.microsoft.com/office/drawing/2014/main" id="{0C569071-A5F8-E7C9-1DC2-DF3EA9F88597}"/>
+            <a:pPr algn="ctr"/>
+            <a:r>
+              <a:rPr lang="ru-RU" b="1" dirty="0"/>
+              <a:t>Код:</a:t>
+            </a:r>
+          </a:p>
+        </p:txBody>
+      </p:sp>
+      <p:sp>
+        <p:nvSpPr>
+          <p:cNvPr id="28" name="TextBox 27">
+            <a:extLst>
+              <a:ext uri="{FF2B5EF4-FFF2-40B4-BE49-F238E27FC236}">
+                <a16:creationId xmlns:a16="http://schemas.microsoft.com/office/drawing/2014/main" id="{7652C659-39B1-B693-6C90-EC889EECEA23}"/>
               </a:ext>
             </a:extLst>
           </p:cNvPr>
@@ -4877,8 +4788,8 @@
         </p:nvSpPr>
         <p:spPr>
           <a:xfrm>
-            <a:off x="1493321" y="2700893"/>
-            <a:ext cx="4203831" cy="369332"/>
+            <a:off x="6095999" y="2700893"/>
+            <a:ext cx="4572001" cy="369332"/>
           </a:xfrm>
           <a:prstGeom prst="rect">
             <a:avLst/>
@@ -4894,42 +4805,6 @@
             <a:pPr algn="ctr"/>
             <a:r>
               <a:rPr lang="ru-RU" b="1" dirty="0"/>
-              <a:t>Код:</a:t>
-            </a:r>
-          </a:p>
-        </p:txBody>
-      </p:sp>
-      <p:sp>
-        <p:nvSpPr>
-          <p:cNvPr id="28" name="TextBox 27">
-            <a:extLst>
-              <a:ext uri="{FF2B5EF4-FFF2-40B4-BE49-F238E27FC236}">
-                <a16:creationId xmlns:a16="http://schemas.microsoft.com/office/drawing/2014/main" id="{7652C659-39B1-B693-6C90-EC889EECEA23}"/>
-              </a:ext>
-            </a:extLst>
-          </p:cNvPr>
-          <p:cNvSpPr txBox="1"/>
-          <p:nvPr/>
-        </p:nvSpPr>
-        <p:spPr>
-          <a:xfrm>
-            <a:off x="6095999" y="2700893"/>
-            <a:ext cx="4572001" cy="369332"/>
-          </a:xfrm>
-          <a:prstGeom prst="rect">
-            <a:avLst/>
-          </a:prstGeom>
-          <a:noFill/>
-        </p:spPr>
-        <p:txBody>
-          <a:bodyPr wrap="square" rtlCol="0" anchor="ctr">
-            <a:spAutoFit/>
-          </a:bodyPr>
-          <a:lstStyle/>
-          <a:p>
-            <a:pPr algn="ctr"/>
-            <a:r>
-              <a:rPr lang="ru-RU" b="1" dirty="0"/>
               <a:t>Вывод:</a:t>
             </a:r>
           </a:p>
@@ -4937,10 +4812,10 @@
       </p:sp>
       <p:pic>
         <p:nvPicPr>
-          <p:cNvPr id="3" name="Рисунок 2">
-            <a:extLst>
-              <a:ext uri="{FF2B5EF4-FFF2-40B4-BE49-F238E27FC236}">
-                <a16:creationId xmlns:a16="http://schemas.microsoft.com/office/drawing/2014/main" id="{7D7953C3-19AC-B0B2-D3C8-E3163E7D6FAB}"/>
+          <p:cNvPr id="6" name="Рисунок 5">
+            <a:extLst>
+              <a:ext uri="{FF2B5EF4-FFF2-40B4-BE49-F238E27FC236}">
+                <a16:creationId xmlns:a16="http://schemas.microsoft.com/office/drawing/2014/main" id="{98410A0E-D7A6-8BAB-6529-91DD7D536B33}"/>
               </a:ext>
             </a:extLst>
           </p:cNvPr>
@@ -4957,20 +4832,56 @@
         </p:blipFill>
         <p:spPr>
           <a:xfrm>
-            <a:off x="1485895" y="3070225"/>
-            <a:ext cx="4211257" cy="1543011"/>
+            <a:off x="1493322" y="3070224"/>
+            <a:ext cx="4203830" cy="1970088"/>
           </a:xfrm>
           <a:prstGeom prst="rect">
             <a:avLst/>
           </a:prstGeom>
         </p:spPr>
       </p:pic>
+      <p:sp>
+        <p:nvSpPr>
+          <p:cNvPr id="7" name="TextBox 6">
+            <a:extLst>
+              <a:ext uri="{FF2B5EF4-FFF2-40B4-BE49-F238E27FC236}">
+                <a16:creationId xmlns:a16="http://schemas.microsoft.com/office/drawing/2014/main" id="{4C213034-1DB3-6960-E018-AC3149DB9E86}"/>
+              </a:ext>
+            </a:extLst>
+          </p:cNvPr>
+          <p:cNvSpPr txBox="1"/>
+          <p:nvPr/>
+        </p:nvSpPr>
+        <p:spPr>
+          <a:xfrm>
+            <a:off x="1493322" y="5040312"/>
+            <a:ext cx="4187494" cy="369332"/>
+          </a:xfrm>
+          <a:prstGeom prst="rect">
+            <a:avLst/>
+          </a:prstGeom>
+          <a:noFill/>
+        </p:spPr>
+        <p:txBody>
+          <a:bodyPr wrap="square" rtlCol="0" anchor="ctr">
+            <a:spAutoFit/>
+          </a:bodyPr>
+          <a:lstStyle/>
+          <a:p>
+            <a:pPr algn="ctr"/>
+            <a:r>
+              <a:rPr lang="ru-RU" b="1" dirty="0"/>
+              <a:t>Терминал:</a:t>
+            </a:r>
+          </a:p>
+        </p:txBody>
+      </p:sp>
       <p:pic>
         <p:nvPicPr>
-          <p:cNvPr id="9" name="Рисунок 8">
-            <a:extLst>
-              <a:ext uri="{FF2B5EF4-FFF2-40B4-BE49-F238E27FC236}">
-                <a16:creationId xmlns:a16="http://schemas.microsoft.com/office/drawing/2014/main" id="{09CCBDFD-9029-C5EE-06FA-C2C7AA2D7E13}"/>
+          <p:cNvPr id="11" name="Рисунок 10">
+            <a:extLst>
+              <a:ext uri="{FF2B5EF4-FFF2-40B4-BE49-F238E27FC236}">
+                <a16:creationId xmlns:a16="http://schemas.microsoft.com/office/drawing/2014/main" id="{22E6C211-DA84-9E6B-04F1-44E27FC06246}"/>
               </a:ext>
             </a:extLst>
           </p:cNvPr>
@@ -4981,25 +4892,61 @@
         </p:nvPicPr>
         <p:blipFill>
           <a:blip r:embed="rId3"/>
-          <a:srcRect l="14717" r="43573"/>
-          <a:stretch/>
+          <a:stretch>
+            <a:fillRect/>
+          </a:stretch>
         </p:blipFill>
         <p:spPr>
           <a:xfrm>
-            <a:off x="1485892" y="4613236"/>
-            <a:ext cx="4211259" cy="1687234"/>
+            <a:off x="1493321" y="5409644"/>
+            <a:ext cx="4187495" cy="899081"/>
           </a:xfrm>
           <a:prstGeom prst="rect">
             <a:avLst/>
           </a:prstGeom>
         </p:spPr>
       </p:pic>
+      <p:sp>
+        <p:nvSpPr>
+          <p:cNvPr id="14" name="TextBox 13">
+            <a:extLst>
+              <a:ext uri="{FF2B5EF4-FFF2-40B4-BE49-F238E27FC236}">
+                <a16:creationId xmlns:a16="http://schemas.microsoft.com/office/drawing/2014/main" id="{F614B7D0-F4C8-26B0-FCDA-B0777CECB6AB}"/>
+              </a:ext>
+            </a:extLst>
+          </p:cNvPr>
+          <p:cNvSpPr txBox="1"/>
+          <p:nvPr/>
+        </p:nvSpPr>
+        <p:spPr>
+          <a:xfrm>
+            <a:off x="1485897" y="1534318"/>
+            <a:ext cx="9182101" cy="707886"/>
+          </a:xfrm>
+          <a:prstGeom prst="rect">
+            <a:avLst/>
+          </a:prstGeom>
+          <a:noFill/>
+        </p:spPr>
+        <p:txBody>
+          <a:bodyPr wrap="square" rtlCol="0" anchor="ctr">
+            <a:spAutoFit/>
+          </a:bodyPr>
+          <a:lstStyle/>
+          <a:p>
+            <a:r>
+              <a:rPr lang="ru-RU" sz="2000" dirty="0"/>
+              <a:t>Суть задания: извлечение нужного фрагмента изображения для фокусировки на отдельной части кадра</a:t>
+            </a:r>
+          </a:p>
+        </p:txBody>
+      </p:sp>
       <p:pic>
         <p:nvPicPr>
-          <p:cNvPr id="12" name="Рисунок 11">
-            <a:extLst>
-              <a:ext uri="{FF2B5EF4-FFF2-40B4-BE49-F238E27FC236}">
-                <a16:creationId xmlns:a16="http://schemas.microsoft.com/office/drawing/2014/main" id="{4B1DF4B8-196C-BA42-FF87-C4322D095C35}"/>
+          <p:cNvPr id="18" name="Рисунок 17">
+            <a:extLst>
+              <a:ext uri="{FF2B5EF4-FFF2-40B4-BE49-F238E27FC236}">
+                <a16:creationId xmlns:a16="http://schemas.microsoft.com/office/drawing/2014/main" id="{42F7ED1A-8EA9-9AB2-2D6E-98300EA7F087}"/>
               </a:ext>
             </a:extLst>
           </p:cNvPr>
@@ -5016,20 +4963,49 @@
         </p:blipFill>
         <p:spPr>
           <a:xfrm>
-            <a:off x="6095998" y="3070225"/>
-            <a:ext cx="4572002" cy="3230245"/>
+            <a:off x="6096000" y="3070224"/>
+            <a:ext cx="3103026" cy="3238501"/>
           </a:xfrm>
           <a:prstGeom prst="rect">
             <a:avLst/>
           </a:prstGeom>
         </p:spPr>
       </p:pic>
-      <p:sp>
-        <p:nvSpPr>
-          <p:cNvPr id="13" name="Номер слайда 12">
-            <a:extLst>
-              <a:ext uri="{FF2B5EF4-FFF2-40B4-BE49-F238E27FC236}">
-                <a16:creationId xmlns:a16="http://schemas.microsoft.com/office/drawing/2014/main" id="{542A7705-CE38-B1F5-D66B-50132E2AF158}"/>
+      <p:pic>
+        <p:nvPicPr>
+          <p:cNvPr id="22" name="Рисунок 21">
+            <a:extLst>
+              <a:ext uri="{FF2B5EF4-FFF2-40B4-BE49-F238E27FC236}">
+                <a16:creationId xmlns:a16="http://schemas.microsoft.com/office/drawing/2014/main" id="{5B06067F-6127-6939-88C1-09AF687F185A}"/>
+              </a:ext>
+            </a:extLst>
+          </p:cNvPr>
+          <p:cNvPicPr>
+            <a:picLocks noChangeAspect="1"/>
+          </p:cNvPicPr>
+          <p:nvPr/>
+        </p:nvPicPr>
+        <p:blipFill>
+          <a:blip r:embed="rId5"/>
+          <a:srcRect r="43595" b="43595"/>
+          <a:stretch/>
+        </p:blipFill>
+        <p:spPr>
+          <a:xfrm>
+            <a:off x="9288779" y="3070224"/>
+            <a:ext cx="1379219" cy="3238501"/>
+          </a:xfrm>
+          <a:prstGeom prst="rect">
+            <a:avLst/>
+          </a:prstGeom>
+        </p:spPr>
+      </p:pic>
+      <p:sp>
+        <p:nvSpPr>
+          <p:cNvPr id="23" name="Номер слайда 22">
+            <a:extLst>
+              <a:ext uri="{FF2B5EF4-FFF2-40B4-BE49-F238E27FC236}">
+                <a16:creationId xmlns:a16="http://schemas.microsoft.com/office/drawing/2014/main" id="{A27B3D08-9886-BA57-671E-FC3A23A83CF9}"/>
               </a:ext>
             </a:extLst>
           </p:cNvPr>
@@ -5047,7 +5023,7 @@
           <a:p>
             <a:r>
               <a:rPr lang="ru-RU" dirty="0"/>
-              <a:t>9</a:t>
+              <a:t>8</a:t>
             </a:r>
           </a:p>
         </p:txBody>
@@ -5055,7 +5031,7 @@
     </p:spTree>
     <p:extLst>
       <p:ext uri="{BB962C8B-B14F-4D97-AF65-F5344CB8AC3E}">
-        <p14:creationId xmlns:p14="http://schemas.microsoft.com/office/powerpoint/2010/main" val="3807799300"/>
+        <p14:creationId xmlns:p14="http://schemas.microsoft.com/office/powerpoint/2010/main" val="1968421665"/>
       </p:ext>
     </p:extLst>
   </p:cSld>
@@ -5110,12 +5086,11 @@
           </a:bodyPr>
           <a:lstStyle/>
           <a:p>
-            <a:pPr algn="just"/>
             <a:r>
               <a:rPr lang="ru-RU" sz="2800" b="1" dirty="0">
                 <a:latin typeface="+mj-lt"/>
               </a:rPr>
-              <a:t>Задание 9. Добавить текст на изображение</a:t>
+              <a:t>Задание 8. Удалить один цветовой канал</a:t>
             </a:r>
           </a:p>
         </p:txBody>
@@ -5134,8 +5109,8 @@
         </p:nvSpPr>
         <p:spPr>
           <a:xfrm>
-            <a:off x="1485891" y="1690766"/>
-            <a:ext cx="9182106" cy="400110"/>
+            <a:off x="1485895" y="1536878"/>
+            <a:ext cx="9182101" cy="707886"/>
           </a:xfrm>
           <a:prstGeom prst="rect">
             <a:avLst/>
@@ -5148,10 +5123,9 @@
           </a:bodyPr>
           <a:lstStyle/>
           <a:p>
-            <a:pPr algn="just"/>
             <a:r>
               <a:rPr lang="ru-RU" sz="2000" dirty="0"/>
-              <a:t>Суть задания: нанесение текстовых меток поверх графических данных</a:t>
+              <a:t>Суть задания: изоляция и обнуление данных одного из каналов для цветокоррекции/тонирования.</a:t>
             </a:r>
           </a:p>
         </p:txBody>
@@ -5230,10 +5204,10 @@
       </p:sp>
       <p:pic>
         <p:nvPicPr>
-          <p:cNvPr id="9" name="Рисунок 8">
-            <a:extLst>
-              <a:ext uri="{FF2B5EF4-FFF2-40B4-BE49-F238E27FC236}">
-                <a16:creationId xmlns:a16="http://schemas.microsoft.com/office/drawing/2014/main" id="{09CCBDFD-9029-C5EE-06FA-C2C7AA2D7E13}"/>
+          <p:cNvPr id="3" name="Рисунок 2">
+            <a:extLst>
+              <a:ext uri="{FF2B5EF4-FFF2-40B4-BE49-F238E27FC236}">
+                <a16:creationId xmlns:a16="http://schemas.microsoft.com/office/drawing/2014/main" id="{7D7953C3-19AC-B0B2-D3C8-E3163E7D6FAB}"/>
               </a:ext>
             </a:extLst>
           </p:cNvPr>
@@ -5244,43 +5218,14 @@
         </p:nvPicPr>
         <p:blipFill>
           <a:blip r:embed="rId2"/>
-          <a:srcRect l="14717" r="43573"/>
-          <a:stretch/>
-        </p:blipFill>
-        <p:spPr>
-          <a:xfrm>
-            <a:off x="1485892" y="4055501"/>
-            <a:ext cx="4211259" cy="2244969"/>
-          </a:xfrm>
-          <a:prstGeom prst="rect">
-            <a:avLst/>
-          </a:prstGeom>
-        </p:spPr>
-      </p:pic>
-      <p:pic>
-        <p:nvPicPr>
-          <p:cNvPr id="8" name="Рисунок 7">
-            <a:extLst>
-              <a:ext uri="{FF2B5EF4-FFF2-40B4-BE49-F238E27FC236}">
-                <a16:creationId xmlns:a16="http://schemas.microsoft.com/office/drawing/2014/main" id="{DAA6E11D-B91F-2C5E-4299-330A77691038}"/>
-              </a:ext>
-            </a:extLst>
-          </p:cNvPr>
-          <p:cNvPicPr>
-            <a:picLocks noChangeAspect="1"/>
-          </p:cNvPicPr>
-          <p:nvPr/>
-        </p:nvPicPr>
-        <p:blipFill>
-          <a:blip r:embed="rId3"/>
           <a:stretch>
             <a:fillRect/>
           </a:stretch>
         </p:blipFill>
         <p:spPr>
           <a:xfrm>
-            <a:off x="1485891" y="3070225"/>
-            <a:ext cx="4211259" cy="985276"/>
+            <a:off x="1485895" y="3070225"/>
+            <a:ext cx="4211257" cy="1543011"/>
           </a:xfrm>
           <a:prstGeom prst="rect">
             <a:avLst/>
@@ -5289,10 +5234,39 @@
       </p:pic>
       <p:pic>
         <p:nvPicPr>
-          <p:cNvPr id="11" name="Рисунок 10">
-            <a:extLst>
-              <a:ext uri="{FF2B5EF4-FFF2-40B4-BE49-F238E27FC236}">
-                <a16:creationId xmlns:a16="http://schemas.microsoft.com/office/drawing/2014/main" id="{A3AB4349-7312-89C1-DAC2-D1E605FB8404}"/>
+          <p:cNvPr id="9" name="Рисунок 8">
+            <a:extLst>
+              <a:ext uri="{FF2B5EF4-FFF2-40B4-BE49-F238E27FC236}">
+                <a16:creationId xmlns:a16="http://schemas.microsoft.com/office/drawing/2014/main" id="{09CCBDFD-9029-C5EE-06FA-C2C7AA2D7E13}"/>
+              </a:ext>
+            </a:extLst>
+          </p:cNvPr>
+          <p:cNvPicPr>
+            <a:picLocks noChangeAspect="1"/>
+          </p:cNvPicPr>
+          <p:nvPr/>
+        </p:nvPicPr>
+        <p:blipFill>
+          <a:blip r:embed="rId3"/>
+          <a:srcRect l="14717" r="43573"/>
+          <a:stretch/>
+        </p:blipFill>
+        <p:spPr>
+          <a:xfrm>
+            <a:off x="1485892" y="4613236"/>
+            <a:ext cx="4211259" cy="1687234"/>
+          </a:xfrm>
+          <a:prstGeom prst="rect">
+            <a:avLst/>
+          </a:prstGeom>
+        </p:spPr>
+      </p:pic>
+      <p:pic>
+        <p:nvPicPr>
+          <p:cNvPr id="12" name="Рисунок 11">
+            <a:extLst>
+              <a:ext uri="{FF2B5EF4-FFF2-40B4-BE49-F238E27FC236}">
+                <a16:creationId xmlns:a16="http://schemas.microsoft.com/office/drawing/2014/main" id="{4B1DF4B8-196C-BA42-FF87-C4322D095C35}"/>
               </a:ext>
             </a:extLst>
           </p:cNvPr>
@@ -5309,8 +5283,8 @@
         </p:blipFill>
         <p:spPr>
           <a:xfrm>
-            <a:off x="6095995" y="3070225"/>
-            <a:ext cx="4572001" cy="3238500"/>
+            <a:off x="6095998" y="3070225"/>
+            <a:ext cx="4572002" cy="3230245"/>
           </a:xfrm>
           <a:prstGeom prst="rect">
             <a:avLst/>
@@ -5322,7 +5296,7 @@
           <p:cNvPr id="13" name="Номер слайда 12">
             <a:extLst>
               <a:ext uri="{FF2B5EF4-FFF2-40B4-BE49-F238E27FC236}">
-                <a16:creationId xmlns:a16="http://schemas.microsoft.com/office/drawing/2014/main" id="{6B9E6622-9382-3575-940F-5EA82209FFF8}"/>
+                <a16:creationId xmlns:a16="http://schemas.microsoft.com/office/drawing/2014/main" id="{542A7705-CE38-B1F5-D66B-50132E2AF158}"/>
               </a:ext>
             </a:extLst>
           </p:cNvPr>
@@ -5340,7 +5314,7 @@
           <a:p>
             <a:r>
               <a:rPr lang="ru-RU" dirty="0"/>
-              <a:t>10</a:t>
+              <a:t>9</a:t>
             </a:r>
           </a:p>
         </p:txBody>
@@ -5348,7 +5322,7 @@
     </p:spTree>
     <p:extLst>
       <p:ext uri="{BB962C8B-B14F-4D97-AF65-F5344CB8AC3E}">
-        <p14:creationId xmlns:p14="http://schemas.microsoft.com/office/powerpoint/2010/main" val="568133293"/>
+        <p14:creationId xmlns:p14="http://schemas.microsoft.com/office/powerpoint/2010/main" val="3807799300"/>
       </p:ext>
     </p:extLst>
   </p:cSld>
@@ -5408,19 +5382,7 @@
               <a:rPr lang="ru-RU" sz="2800" b="1" dirty="0">
                 <a:latin typeface="+mj-lt"/>
               </a:rPr>
-              <a:t>Задание 10. </a:t>
-            </a:r>
-            <a:r>
-              <a:rPr lang="ru-RU" sz="2800" b="1" dirty="0" err="1">
-                <a:latin typeface="+mj-lt"/>
-              </a:rPr>
-              <a:t>Бинаризовать</a:t>
-            </a:r>
-            <a:r>
-              <a:rPr lang="ru-RU" sz="2800" b="1" dirty="0">
-                <a:latin typeface="+mj-lt"/>
-              </a:rPr>
-              <a:t> изображение и сохранить</a:t>
+              <a:t>Задание 9. Добавить текст на изображение</a:t>
             </a:r>
           </a:p>
         </p:txBody>
@@ -5439,8 +5401,8 @@
         </p:nvSpPr>
         <p:spPr>
           <a:xfrm>
-            <a:off x="1485891" y="1536878"/>
-            <a:ext cx="9182106" cy="707886"/>
+            <a:off x="1485891" y="1690766"/>
+            <a:ext cx="9182106" cy="400110"/>
           </a:xfrm>
           <a:prstGeom prst="rect">
             <a:avLst/>
@@ -5456,7 +5418,7 @@
             <a:pPr algn="just"/>
             <a:r>
               <a:rPr lang="ru-RU" sz="2000" dirty="0"/>
-              <a:t>Суть задания: разделение пикселей по порогу яркости на две группы (черное/белое без серых полутонов) для отделения объектов от фона.</a:t>
+              <a:t>Суть задания: нанесение текстовых меток поверх графических данных</a:t>
             </a:r>
           </a:p>
         </p:txBody>
@@ -5535,10 +5497,10 @@
       </p:sp>
       <p:pic>
         <p:nvPicPr>
-          <p:cNvPr id="3" name="Рисунок 2">
-            <a:extLst>
-              <a:ext uri="{FF2B5EF4-FFF2-40B4-BE49-F238E27FC236}">
-                <a16:creationId xmlns:a16="http://schemas.microsoft.com/office/drawing/2014/main" id="{FEE68230-89B6-ECB9-8CBD-A9CF199EC55B}"/>
+          <p:cNvPr id="9" name="Рисунок 8">
+            <a:extLst>
+              <a:ext uri="{FF2B5EF4-FFF2-40B4-BE49-F238E27FC236}">
+                <a16:creationId xmlns:a16="http://schemas.microsoft.com/office/drawing/2014/main" id="{09CCBDFD-9029-C5EE-06FA-C2C7AA2D7E13}"/>
               </a:ext>
             </a:extLst>
           </p:cNvPr>
@@ -5549,62 +5511,25 @@
         </p:nvPicPr>
         <p:blipFill>
           <a:blip r:embed="rId2"/>
-          <a:stretch>
-            <a:fillRect/>
-          </a:stretch>
+          <a:srcRect l="14717" r="43573"/>
+          <a:stretch/>
         </p:blipFill>
         <p:spPr>
           <a:xfrm>
-            <a:off x="1493317" y="3070225"/>
-            <a:ext cx="4203831" cy="1779854"/>
+            <a:off x="1485892" y="4055501"/>
+            <a:ext cx="4211259" cy="2244969"/>
           </a:xfrm>
           <a:prstGeom prst="rect">
             <a:avLst/>
           </a:prstGeom>
         </p:spPr>
       </p:pic>
-      <p:sp>
-        <p:nvSpPr>
-          <p:cNvPr id="4" name="TextBox 3">
-            <a:extLst>
-              <a:ext uri="{FF2B5EF4-FFF2-40B4-BE49-F238E27FC236}">
-                <a16:creationId xmlns:a16="http://schemas.microsoft.com/office/drawing/2014/main" id="{93DE9065-B19C-FCDD-6886-472F9BB135B7}"/>
-              </a:ext>
-            </a:extLst>
-          </p:cNvPr>
-          <p:cNvSpPr txBox="1"/>
-          <p:nvPr/>
-        </p:nvSpPr>
-        <p:spPr>
-          <a:xfrm>
-            <a:off x="1493322" y="5040312"/>
-            <a:ext cx="4187494" cy="369332"/>
-          </a:xfrm>
-          <a:prstGeom prst="rect">
-            <a:avLst/>
-          </a:prstGeom>
-          <a:noFill/>
-        </p:spPr>
-        <p:txBody>
-          <a:bodyPr wrap="square" rtlCol="0" anchor="ctr">
-            <a:spAutoFit/>
-          </a:bodyPr>
-          <a:lstStyle/>
-          <a:p>
-            <a:pPr algn="ctr"/>
-            <a:r>
-              <a:rPr lang="ru-RU" b="1" dirty="0"/>
-              <a:t>Терминал:</a:t>
-            </a:r>
-          </a:p>
-        </p:txBody>
-      </p:sp>
       <p:pic>
         <p:nvPicPr>
-          <p:cNvPr id="10" name="Рисунок 9">
-            <a:extLst>
-              <a:ext uri="{FF2B5EF4-FFF2-40B4-BE49-F238E27FC236}">
-                <a16:creationId xmlns:a16="http://schemas.microsoft.com/office/drawing/2014/main" id="{D48B76AC-DCD4-7547-2D7F-977B2694ED88}"/>
+          <p:cNvPr id="8" name="Рисунок 7">
+            <a:extLst>
+              <a:ext uri="{FF2B5EF4-FFF2-40B4-BE49-F238E27FC236}">
+                <a16:creationId xmlns:a16="http://schemas.microsoft.com/office/drawing/2014/main" id="{DAA6E11D-B91F-2C5E-4299-330A77691038}"/>
               </a:ext>
             </a:extLst>
           </p:cNvPr>
@@ -5621,8 +5546,8 @@
         </p:blipFill>
         <p:spPr>
           <a:xfrm>
-            <a:off x="1485891" y="5409645"/>
-            <a:ext cx="4211257" cy="899080"/>
+            <a:off x="1485891" y="3070225"/>
+            <a:ext cx="4211259" cy="985276"/>
           </a:xfrm>
           <a:prstGeom prst="rect">
             <a:avLst/>
@@ -5631,10 +5556,10 @@
       </p:pic>
       <p:pic>
         <p:nvPicPr>
-          <p:cNvPr id="12" name="Рисунок 11">
-            <a:extLst>
-              <a:ext uri="{FF2B5EF4-FFF2-40B4-BE49-F238E27FC236}">
-                <a16:creationId xmlns:a16="http://schemas.microsoft.com/office/drawing/2014/main" id="{C6FA2AC8-72B5-A7FD-CC84-698521F9F2D5}"/>
+          <p:cNvPr id="11" name="Рисунок 10">
+            <a:extLst>
+              <a:ext uri="{FF2B5EF4-FFF2-40B4-BE49-F238E27FC236}">
+                <a16:creationId xmlns:a16="http://schemas.microsoft.com/office/drawing/2014/main" id="{A3AB4349-7312-89C1-DAC2-D1E605FB8404}"/>
               </a:ext>
             </a:extLst>
           </p:cNvPr>
@@ -5645,43 +5570,14 @@
         </p:nvPicPr>
         <p:blipFill>
           <a:blip r:embed="rId4"/>
-          <a:srcRect l="14717" r="43573"/>
-          <a:stretch/>
-        </p:blipFill>
-        <p:spPr>
-          <a:xfrm>
-            <a:off x="1485889" y="4850079"/>
-            <a:ext cx="4211259" cy="190233"/>
-          </a:xfrm>
-          <a:prstGeom prst="rect">
-            <a:avLst/>
-          </a:prstGeom>
-        </p:spPr>
-      </p:pic>
-      <p:pic>
-        <p:nvPicPr>
-          <p:cNvPr id="14" name="Рисунок 13">
-            <a:extLst>
-              <a:ext uri="{FF2B5EF4-FFF2-40B4-BE49-F238E27FC236}">
-                <a16:creationId xmlns:a16="http://schemas.microsoft.com/office/drawing/2014/main" id="{436DCDEE-9395-56D3-39C9-85558190B51C}"/>
-              </a:ext>
-            </a:extLst>
-          </p:cNvPr>
-          <p:cNvPicPr>
-            <a:picLocks noChangeAspect="1"/>
-          </p:cNvPicPr>
-          <p:nvPr/>
-        </p:nvPicPr>
-        <p:blipFill>
-          <a:blip r:embed="rId5"/>
           <a:stretch>
             <a:fillRect/>
           </a:stretch>
         </p:blipFill>
         <p:spPr>
           <a:xfrm>
-            <a:off x="6079663" y="3070225"/>
-            <a:ext cx="4588334" cy="3239393"/>
+            <a:off x="6095995" y="3070225"/>
+            <a:ext cx="4572001" cy="3238500"/>
           </a:xfrm>
           <a:prstGeom prst="rect">
             <a:avLst/>
@@ -5690,10 +5586,10 @@
       </p:pic>
       <p:sp>
         <p:nvSpPr>
-          <p:cNvPr id="15" name="Номер слайда 14">
-            <a:extLst>
-              <a:ext uri="{FF2B5EF4-FFF2-40B4-BE49-F238E27FC236}">
-                <a16:creationId xmlns:a16="http://schemas.microsoft.com/office/drawing/2014/main" id="{53D5D76B-175F-2DD7-0427-4E335E4EAC94}"/>
+          <p:cNvPr id="13" name="Номер слайда 12">
+            <a:extLst>
+              <a:ext uri="{FF2B5EF4-FFF2-40B4-BE49-F238E27FC236}">
+                <a16:creationId xmlns:a16="http://schemas.microsoft.com/office/drawing/2014/main" id="{6B9E6622-9382-3575-940F-5EA82209FFF8}"/>
               </a:ext>
             </a:extLst>
           </p:cNvPr>
@@ -5711,7 +5607,7 @@
           <a:p>
             <a:r>
               <a:rPr lang="ru-RU" dirty="0"/>
-              <a:t>11</a:t>
+              <a:t>10</a:t>
             </a:r>
           </a:p>
         </p:txBody>
@@ -5719,7 +5615,7 @@
     </p:spTree>
     <p:extLst>
       <p:ext uri="{BB962C8B-B14F-4D97-AF65-F5344CB8AC3E}">
-        <p14:creationId xmlns:p14="http://schemas.microsoft.com/office/powerpoint/2010/main" val="1310525480"/>
+        <p14:creationId xmlns:p14="http://schemas.microsoft.com/office/powerpoint/2010/main" val="568133293"/>
       </p:ext>
     </p:extLst>
   </p:cSld>
@@ -5760,8 +5656,8 @@
         </p:nvSpPr>
         <p:spPr>
           <a:xfrm>
-            <a:off x="1478764" y="448811"/>
-            <a:ext cx="9182101" cy="766047"/>
+            <a:off x="1485896" y="557530"/>
+            <a:ext cx="9182101" cy="523220"/>
           </a:xfrm>
           <a:prstGeom prst="rect">
             <a:avLst/>
@@ -5774,11 +5670,24 @@
           </a:bodyPr>
           <a:lstStyle/>
           <a:p>
+            <a:pPr algn="just"/>
             <a:r>
               <a:rPr lang="ru-RU" sz="2800" b="1" dirty="0">
                 <a:latin typeface="+mj-lt"/>
               </a:rPr>
-              <a:t>Контрольные вопросы</a:t>
+              <a:t>Задание 10. </a:t>
+            </a:r>
+            <a:r>
+              <a:rPr lang="ru-RU" sz="2800" b="1" dirty="0" err="1">
+                <a:latin typeface="+mj-lt"/>
+              </a:rPr>
+              <a:t>Бинаризовать</a:t>
+            </a:r>
+            <a:r>
+              <a:rPr lang="ru-RU" sz="2800" b="1" dirty="0">
+                <a:latin typeface="+mj-lt"/>
+              </a:rPr>
+              <a:t> изображение и сохранить</a:t>
             </a:r>
           </a:p>
         </p:txBody>
@@ -5797,8 +5706,8 @@
         </p:nvSpPr>
         <p:spPr>
           <a:xfrm>
-            <a:off x="1487488" y="1024212"/>
-            <a:ext cx="9182106" cy="540739"/>
+            <a:off x="1485891" y="1536878"/>
+            <a:ext cx="9182106" cy="707886"/>
           </a:xfrm>
           <a:prstGeom prst="rect">
             <a:avLst/>
@@ -5813,18 +5722,18 @@
           <a:p>
             <a:pPr algn="just"/>
             <a:r>
-              <a:rPr lang="ru-RU" b="1" dirty="0"/>
-              <a:t>1. Что такое пиксель и как он представлен в цветном изображении?</a:t>
-            </a:r>
-          </a:p>
-        </p:txBody>
-      </p:sp>
-      <p:sp>
-        <p:nvSpPr>
-          <p:cNvPr id="7" name="TextBox 6">
-            <a:extLst>
-              <a:ext uri="{FF2B5EF4-FFF2-40B4-BE49-F238E27FC236}">
-                <a16:creationId xmlns:a16="http://schemas.microsoft.com/office/drawing/2014/main" id="{D665E4DE-7D6B-49F6-7D70-49D3CC230020}"/>
+              <a:rPr lang="ru-RU" sz="2000" dirty="0"/>
+              <a:t>Суть задания: разделение пикселей по порогу яркости на две группы (черное/белое без серых полутонов) для отделения объектов от фона.</a:t>
+            </a:r>
+          </a:p>
+        </p:txBody>
+      </p:sp>
+      <p:sp>
+        <p:nvSpPr>
+          <p:cNvPr id="21" name="TextBox 20">
+            <a:extLst>
+              <a:ext uri="{FF2B5EF4-FFF2-40B4-BE49-F238E27FC236}">
+                <a16:creationId xmlns:a16="http://schemas.microsoft.com/office/drawing/2014/main" id="{0C569071-A5F8-E7C9-1DC2-DF3EA9F88597}"/>
               </a:ext>
             </a:extLst>
           </p:cNvPr>
@@ -5833,8 +5742,8 @@
         </p:nvSpPr>
         <p:spPr>
           <a:xfrm>
-            <a:off x="1487488" y="1332946"/>
-            <a:ext cx="9182106" cy="946293"/>
+            <a:off x="1493321" y="2700893"/>
+            <a:ext cx="4203831" cy="369332"/>
           </a:xfrm>
           <a:prstGeom prst="rect">
             <a:avLst/>
@@ -5847,24 +5756,20 @@
           </a:bodyPr>
           <a:lstStyle/>
           <a:p>
+            <a:pPr algn="ctr"/>
             <a:r>
               <a:rPr lang="ru-RU" b="1" dirty="0"/>
-              <a:t>Ответ: </a:t>
-            </a:r>
-            <a:r>
-              <a:rPr lang="ru-RU" dirty="0"/>
-              <a:t>наименьший элемент цифрового изображения, содержащий информацию о яркости и цвете</a:t>
-            </a:r>
-            <a:endParaRPr lang="ru-RU" b="1" dirty="0"/>
-          </a:p>
-        </p:txBody>
-      </p:sp>
-      <p:sp>
-        <p:nvSpPr>
-          <p:cNvPr id="8" name="TextBox 7">
-            <a:extLst>
-              <a:ext uri="{FF2B5EF4-FFF2-40B4-BE49-F238E27FC236}">
-                <a16:creationId xmlns:a16="http://schemas.microsoft.com/office/drawing/2014/main" id="{22BCE2EF-1E4E-4104-5239-E6203734018B}"/>
+              <a:t>Код:</a:t>
+            </a:r>
+          </a:p>
+        </p:txBody>
+      </p:sp>
+      <p:sp>
+        <p:nvSpPr>
+          <p:cNvPr id="28" name="TextBox 27">
+            <a:extLst>
+              <a:ext uri="{FF2B5EF4-FFF2-40B4-BE49-F238E27FC236}">
+                <a16:creationId xmlns:a16="http://schemas.microsoft.com/office/drawing/2014/main" id="{7652C659-39B1-B693-6C90-EC889EECEA23}"/>
               </a:ext>
             </a:extLst>
           </p:cNvPr>
@@ -5873,8 +5778,8 @@
         </p:nvSpPr>
         <p:spPr>
           <a:xfrm>
-            <a:off x="1487488" y="2052466"/>
-            <a:ext cx="9182106" cy="540739"/>
+            <a:off x="6095999" y="2700893"/>
+            <a:ext cx="4572001" cy="369332"/>
           </a:xfrm>
           <a:prstGeom prst="rect">
             <a:avLst/>
@@ -5887,20 +5792,50 @@
           </a:bodyPr>
           <a:lstStyle/>
           <a:p>
-            <a:pPr algn="just"/>
+            <a:pPr algn="ctr"/>
             <a:r>
               <a:rPr lang="ru-RU" b="1" dirty="0"/>
-              <a:t>2. В чем разница между RGB и HSV?</a:t>
-            </a:r>
-          </a:p>
-        </p:txBody>
-      </p:sp>
-      <p:sp>
-        <p:nvSpPr>
-          <p:cNvPr id="9" name="TextBox 8">
-            <a:extLst>
-              <a:ext uri="{FF2B5EF4-FFF2-40B4-BE49-F238E27FC236}">
-                <a16:creationId xmlns:a16="http://schemas.microsoft.com/office/drawing/2014/main" id="{1B6288AE-09CC-5A07-59ED-90CC972FC3F3}"/>
+              <a:t>Вывод:</a:t>
+            </a:r>
+          </a:p>
+        </p:txBody>
+      </p:sp>
+      <p:pic>
+        <p:nvPicPr>
+          <p:cNvPr id="3" name="Рисунок 2">
+            <a:extLst>
+              <a:ext uri="{FF2B5EF4-FFF2-40B4-BE49-F238E27FC236}">
+                <a16:creationId xmlns:a16="http://schemas.microsoft.com/office/drawing/2014/main" id="{FEE68230-89B6-ECB9-8CBD-A9CF199EC55B}"/>
+              </a:ext>
+            </a:extLst>
+          </p:cNvPr>
+          <p:cNvPicPr>
+            <a:picLocks noChangeAspect="1"/>
+          </p:cNvPicPr>
+          <p:nvPr/>
+        </p:nvPicPr>
+        <p:blipFill>
+          <a:blip r:embed="rId2"/>
+          <a:stretch>
+            <a:fillRect/>
+          </a:stretch>
+        </p:blipFill>
+        <p:spPr>
+          <a:xfrm>
+            <a:off x="1493317" y="3070225"/>
+            <a:ext cx="4203831" cy="1779854"/>
+          </a:xfrm>
+          <a:prstGeom prst="rect">
+            <a:avLst/>
+          </a:prstGeom>
+        </p:spPr>
+      </p:pic>
+      <p:sp>
+        <p:nvSpPr>
+          <p:cNvPr id="4" name="TextBox 3">
+            <a:extLst>
+              <a:ext uri="{FF2B5EF4-FFF2-40B4-BE49-F238E27FC236}">
+                <a16:creationId xmlns:a16="http://schemas.microsoft.com/office/drawing/2014/main" id="{93DE9065-B19C-FCDD-6886-472F9BB135B7}"/>
               </a:ext>
             </a:extLst>
           </p:cNvPr>
@@ -5909,8 +5844,8 @@
         </p:nvSpPr>
         <p:spPr>
           <a:xfrm>
-            <a:off x="1487488" y="2237875"/>
-            <a:ext cx="9182106" cy="1757402"/>
+            <a:off x="1493322" y="5040312"/>
+            <a:ext cx="4187494" cy="369332"/>
           </a:xfrm>
           <a:prstGeom prst="rect">
             <a:avLst/>
@@ -5923,156 +5858,109 @@
           </a:bodyPr>
           <a:lstStyle/>
           <a:p>
+            <a:pPr algn="ctr"/>
             <a:r>
               <a:rPr lang="ru-RU" b="1" dirty="0"/>
-              <a:t>Ответ: </a:t>
-            </a:r>
-            <a:r>
-              <a:rPr lang="en-US" dirty="0"/>
-              <a:t>RGB </a:t>
-            </a:r>
-            <a:r>
-              <a:rPr lang="ru-RU" dirty="0"/>
-              <a:t>основан на смешивании трёх основных цветов (красного, зеленого и синего) и является основным способом представления цветов на экране</a:t>
-            </a:r>
-            <a:r>
-              <a:rPr lang="en-US" dirty="0"/>
-              <a:t>; </a:t>
-            </a:r>
-            <a:r>
-              <a:rPr lang="ru-RU" dirty="0"/>
-              <a:t>в </a:t>
-            </a:r>
-            <a:r>
-              <a:rPr lang="en-US" dirty="0"/>
-              <a:t>HSV </a:t>
-            </a:r>
-            <a:r>
-              <a:rPr lang="ru-RU" dirty="0"/>
-              <a:t>цвета представлены через параметры </a:t>
-            </a:r>
-            <a:r>
-              <a:rPr lang="en-US" dirty="0"/>
-              <a:t>Hue (</a:t>
-            </a:r>
-            <a:r>
-              <a:rPr lang="ru-RU" dirty="0"/>
-              <a:t>цветовой тон)</a:t>
-            </a:r>
-            <a:r>
-              <a:rPr lang="en-US" dirty="0"/>
-              <a:t>, Saturation (</a:t>
-            </a:r>
-            <a:r>
-              <a:rPr lang="ru-RU" dirty="0"/>
-              <a:t>насыщенность) и </a:t>
-            </a:r>
-            <a:r>
-              <a:rPr lang="en-US" dirty="0"/>
-              <a:t>Value (</a:t>
-            </a:r>
-            <a:r>
-              <a:rPr lang="ru-RU" dirty="0"/>
-              <a:t>значение яркости), что удобно для обработки оттенков</a:t>
-            </a:r>
-            <a:endParaRPr lang="ru-RU" b="1" dirty="0"/>
-          </a:p>
-        </p:txBody>
-      </p:sp>
-      <p:sp>
-        <p:nvSpPr>
-          <p:cNvPr id="11" name="TextBox 10">
-            <a:extLst>
-              <a:ext uri="{FF2B5EF4-FFF2-40B4-BE49-F238E27FC236}">
-                <a16:creationId xmlns:a16="http://schemas.microsoft.com/office/drawing/2014/main" id="{BF6A8668-D6E4-5A1C-E82D-453FBC4EA553}"/>
-              </a:ext>
-            </a:extLst>
-          </p:cNvPr>
-          <p:cNvSpPr txBox="1"/>
-          <p:nvPr/>
-        </p:nvSpPr>
-        <p:spPr>
-          <a:xfrm>
-            <a:off x="1496217" y="3636327"/>
-            <a:ext cx="9164648" cy="540739"/>
-          </a:xfrm>
-          <a:prstGeom prst="rect">
-            <a:avLst/>
-          </a:prstGeom>
-          <a:noFill/>
-        </p:spPr>
-        <p:txBody>
-          <a:bodyPr wrap="square" rtlCol="0" anchor="ctr">
-            <a:spAutoFit/>
-          </a:bodyPr>
-          <a:lstStyle/>
-          <a:p>
-            <a:pPr algn="just"/>
-            <a:r>
-              <a:rPr lang="ru-RU" b="1" dirty="0"/>
-              <a:t>3. Как получить отдельный цветовой канал в </a:t>
-            </a:r>
-            <a:r>
-              <a:rPr lang="ru-RU" b="1" dirty="0" err="1"/>
-              <a:t>OpenCV</a:t>
-            </a:r>
-            <a:r>
-              <a:rPr lang="ru-RU" b="1" dirty="0"/>
-              <a:t>?</a:t>
-            </a:r>
-          </a:p>
-        </p:txBody>
-      </p:sp>
-      <p:sp>
-        <p:nvSpPr>
-          <p:cNvPr id="13" name="TextBox 12">
-            <a:extLst>
-              <a:ext uri="{FF2B5EF4-FFF2-40B4-BE49-F238E27FC236}">
-                <a16:creationId xmlns:a16="http://schemas.microsoft.com/office/drawing/2014/main" id="{6A0D2500-A0A1-8B4C-1976-D68650FD4B24}"/>
-              </a:ext>
-            </a:extLst>
-          </p:cNvPr>
-          <p:cNvSpPr txBox="1"/>
-          <p:nvPr/>
-        </p:nvSpPr>
-        <p:spPr>
-          <a:xfrm>
-            <a:off x="1487488" y="4008564"/>
-            <a:ext cx="9182106" cy="540739"/>
-          </a:xfrm>
-          <a:prstGeom prst="rect">
-            <a:avLst/>
-          </a:prstGeom>
-          <a:noFill/>
-        </p:spPr>
-        <p:txBody>
-          <a:bodyPr wrap="square" rtlCol="0" anchor="ctr">
-            <a:spAutoFit/>
-          </a:bodyPr>
-          <a:lstStyle/>
-          <a:p>
-            <a:r>
-              <a:rPr lang="ru-RU" b="1" dirty="0"/>
-              <a:t>Ответ: </a:t>
-            </a:r>
-            <a:r>
-              <a:rPr lang="ru-RU" dirty="0"/>
-              <a:t>с помощью функции разделения каналов </a:t>
-            </a:r>
-            <a:r>
-              <a:rPr lang="en-US" dirty="0"/>
-              <a:t>cv2.split()</a:t>
-            </a:r>
-            <a:endParaRPr lang="ru-RU" b="1" dirty="0"/>
-          </a:p>
-        </p:txBody>
-      </p:sp>
+              <a:t>Терминал:</a:t>
+            </a:r>
+          </a:p>
+        </p:txBody>
+      </p:sp>
+      <p:pic>
+        <p:nvPicPr>
+          <p:cNvPr id="10" name="Рисунок 9">
+            <a:extLst>
+              <a:ext uri="{FF2B5EF4-FFF2-40B4-BE49-F238E27FC236}">
+                <a16:creationId xmlns:a16="http://schemas.microsoft.com/office/drawing/2014/main" id="{D48B76AC-DCD4-7547-2D7F-977B2694ED88}"/>
+              </a:ext>
+            </a:extLst>
+          </p:cNvPr>
+          <p:cNvPicPr>
+            <a:picLocks noChangeAspect="1"/>
+          </p:cNvPicPr>
+          <p:nvPr/>
+        </p:nvPicPr>
+        <p:blipFill>
+          <a:blip r:embed="rId3"/>
+          <a:stretch>
+            <a:fillRect/>
+          </a:stretch>
+        </p:blipFill>
+        <p:spPr>
+          <a:xfrm>
+            <a:off x="1485891" y="5409645"/>
+            <a:ext cx="4211257" cy="899080"/>
+          </a:xfrm>
+          <a:prstGeom prst="rect">
+            <a:avLst/>
+          </a:prstGeom>
+        </p:spPr>
+      </p:pic>
+      <p:pic>
+        <p:nvPicPr>
+          <p:cNvPr id="12" name="Рисунок 11">
+            <a:extLst>
+              <a:ext uri="{FF2B5EF4-FFF2-40B4-BE49-F238E27FC236}">
+                <a16:creationId xmlns:a16="http://schemas.microsoft.com/office/drawing/2014/main" id="{C6FA2AC8-72B5-A7FD-CC84-698521F9F2D5}"/>
+              </a:ext>
+            </a:extLst>
+          </p:cNvPr>
+          <p:cNvPicPr>
+            <a:picLocks noChangeAspect="1"/>
+          </p:cNvPicPr>
+          <p:nvPr/>
+        </p:nvPicPr>
+        <p:blipFill>
+          <a:blip r:embed="rId4"/>
+          <a:srcRect l="14717" r="43573"/>
+          <a:stretch/>
+        </p:blipFill>
+        <p:spPr>
+          <a:xfrm>
+            <a:off x="1485889" y="4850079"/>
+            <a:ext cx="4211259" cy="190233"/>
+          </a:xfrm>
+          <a:prstGeom prst="rect">
+            <a:avLst/>
+          </a:prstGeom>
+        </p:spPr>
+      </p:pic>
+      <p:pic>
+        <p:nvPicPr>
+          <p:cNvPr id="14" name="Рисунок 13">
+            <a:extLst>
+              <a:ext uri="{FF2B5EF4-FFF2-40B4-BE49-F238E27FC236}">
+                <a16:creationId xmlns:a16="http://schemas.microsoft.com/office/drawing/2014/main" id="{436DCDEE-9395-56D3-39C9-85558190B51C}"/>
+              </a:ext>
+            </a:extLst>
+          </p:cNvPr>
+          <p:cNvPicPr>
+            <a:picLocks noChangeAspect="1"/>
+          </p:cNvPicPr>
+          <p:nvPr/>
+        </p:nvPicPr>
+        <p:blipFill>
+          <a:blip r:embed="rId5"/>
+          <a:stretch>
+            <a:fillRect/>
+          </a:stretch>
+        </p:blipFill>
+        <p:spPr>
+          <a:xfrm>
+            <a:off x="6079663" y="3070225"/>
+            <a:ext cx="4588334" cy="3239393"/>
+          </a:xfrm>
+          <a:prstGeom prst="rect">
+            <a:avLst/>
+          </a:prstGeom>
+        </p:spPr>
+      </p:pic>
       <p:sp>
         <p:nvSpPr>
           <p:cNvPr id="15" name="Номер слайда 14">
             <a:extLst>
               <a:ext uri="{FF2B5EF4-FFF2-40B4-BE49-F238E27FC236}">
-                <a16:creationId xmlns:a16="http://schemas.microsoft.com/office/drawing/2014/main" id="{E5B656E7-25A9-3B44-9104-A4F257D11ED5}"/>
+                <a16:creationId xmlns:a16="http://schemas.microsoft.com/office/drawing/2014/main" id="{53D5D76B-175F-2DD7-0427-4E335E4EAC94}"/>
               </a:ext>
             </a:extLst>
           </p:cNvPr>
@@ -6090,179 +5978,15 @@
           <a:p>
             <a:r>
               <a:rPr lang="ru-RU" dirty="0"/>
-              <a:t>12</a:t>
-            </a:r>
-          </a:p>
-        </p:txBody>
-      </p:sp>
-      <p:sp>
-        <p:nvSpPr>
-          <p:cNvPr id="16" name="TextBox 15">
-            <a:extLst>
-              <a:ext uri="{FF2B5EF4-FFF2-40B4-BE49-F238E27FC236}">
-                <a16:creationId xmlns:a16="http://schemas.microsoft.com/office/drawing/2014/main" id="{9FCB03C1-0B76-2E08-203C-12C1A8C68811}"/>
-              </a:ext>
-            </a:extLst>
-          </p:cNvPr>
-          <p:cNvSpPr txBox="1"/>
-          <p:nvPr/>
-        </p:nvSpPr>
-        <p:spPr>
-          <a:xfrm>
-            <a:off x="1478762" y="4377896"/>
-            <a:ext cx="9182106" cy="540739"/>
-          </a:xfrm>
-          <a:prstGeom prst="rect">
-            <a:avLst/>
-          </a:prstGeom>
-          <a:noFill/>
-        </p:spPr>
-        <p:txBody>
-          <a:bodyPr wrap="square" rtlCol="0" anchor="ctr">
-            <a:spAutoFit/>
-          </a:bodyPr>
-          <a:lstStyle/>
-          <a:p>
-            <a:pPr algn="just"/>
-            <a:r>
-              <a:rPr lang="ru-RU" b="1" dirty="0"/>
-              <a:t>4. Как преобразовать цветное изображение в градации серого?</a:t>
-            </a:r>
-          </a:p>
-        </p:txBody>
-      </p:sp>
-      <p:sp>
-        <p:nvSpPr>
-          <p:cNvPr id="17" name="TextBox 16">
-            <a:extLst>
-              <a:ext uri="{FF2B5EF4-FFF2-40B4-BE49-F238E27FC236}">
-                <a16:creationId xmlns:a16="http://schemas.microsoft.com/office/drawing/2014/main" id="{794C8A30-3803-DF2B-B667-815A58C44D49}"/>
-              </a:ext>
-            </a:extLst>
-          </p:cNvPr>
-          <p:cNvSpPr txBox="1"/>
-          <p:nvPr/>
-        </p:nvSpPr>
-        <p:spPr>
-          <a:xfrm>
-            <a:off x="1485893" y="4686657"/>
-            <a:ext cx="9167841" cy="946293"/>
-          </a:xfrm>
-          <a:prstGeom prst="rect">
-            <a:avLst/>
-          </a:prstGeom>
-          <a:noFill/>
-        </p:spPr>
-        <p:txBody>
-          <a:bodyPr wrap="square" rtlCol="0" anchor="ctr">
-            <a:spAutoFit/>
-          </a:bodyPr>
-          <a:lstStyle/>
-          <a:p>
-            <a:r>
-              <a:rPr lang="ru-RU" b="1" dirty="0"/>
-              <a:t>Ответ: </a:t>
-            </a:r>
-            <a:r>
-              <a:rPr lang="ru-RU" dirty="0"/>
-              <a:t>с помощью функции изменения цветового пространства </a:t>
-            </a:r>
-            <a:r>
-              <a:rPr lang="en-US" dirty="0"/>
-              <a:t>cv2.cvtColor() </a:t>
-            </a:r>
-            <a:r>
-              <a:rPr lang="ru-RU" dirty="0"/>
-              <a:t>с флагом </a:t>
-            </a:r>
-            <a:r>
-              <a:rPr lang="en-US" dirty="0"/>
-              <a:t>cv2.COLOR_BGR2GRAY</a:t>
-            </a:r>
-            <a:endParaRPr lang="ru-RU" b="1" dirty="0"/>
-          </a:p>
-        </p:txBody>
-      </p:sp>
-      <p:sp>
-        <p:nvSpPr>
-          <p:cNvPr id="18" name="TextBox 17">
-            <a:extLst>
-              <a:ext uri="{FF2B5EF4-FFF2-40B4-BE49-F238E27FC236}">
-                <a16:creationId xmlns:a16="http://schemas.microsoft.com/office/drawing/2014/main" id="{3C944073-96C3-A880-15BE-6FC4998BB818}"/>
-              </a:ext>
-            </a:extLst>
-          </p:cNvPr>
-          <p:cNvSpPr txBox="1"/>
-          <p:nvPr/>
-        </p:nvSpPr>
-        <p:spPr>
-          <a:xfrm>
-            <a:off x="1485893" y="5406150"/>
-            <a:ext cx="9159859" cy="540739"/>
-          </a:xfrm>
-          <a:prstGeom prst="rect">
-            <a:avLst/>
-          </a:prstGeom>
-          <a:noFill/>
-        </p:spPr>
-        <p:txBody>
-          <a:bodyPr wrap="square" rtlCol="0" anchor="ctr">
-            <a:spAutoFit/>
-          </a:bodyPr>
-          <a:lstStyle/>
-          <a:p>
-            <a:pPr algn="just"/>
-            <a:r>
-              <a:rPr lang="ru-RU" b="1" dirty="0"/>
-              <a:t>5. Что такое альфа-канал?</a:t>
-            </a:r>
-          </a:p>
-        </p:txBody>
-      </p:sp>
-      <p:sp>
-        <p:nvSpPr>
-          <p:cNvPr id="19" name="TextBox 18">
-            <a:extLst>
-              <a:ext uri="{FF2B5EF4-FFF2-40B4-BE49-F238E27FC236}">
-                <a16:creationId xmlns:a16="http://schemas.microsoft.com/office/drawing/2014/main" id="{0D9D7265-9BC1-3DE0-6747-8C9EA0B1A37E}"/>
-              </a:ext>
-            </a:extLst>
-          </p:cNvPr>
-          <p:cNvSpPr txBox="1"/>
-          <p:nvPr/>
-        </p:nvSpPr>
-        <p:spPr>
-          <a:xfrm>
-            <a:off x="1485893" y="5775482"/>
-            <a:ext cx="9167841" cy="540739"/>
-          </a:xfrm>
-          <a:prstGeom prst="rect">
-            <a:avLst/>
-          </a:prstGeom>
-          <a:noFill/>
-        </p:spPr>
-        <p:txBody>
-          <a:bodyPr wrap="square" rtlCol="0" anchor="ctr">
-            <a:spAutoFit/>
-          </a:bodyPr>
-          <a:lstStyle/>
-          <a:p>
-            <a:r>
-              <a:rPr lang="ru-RU" b="1" dirty="0"/>
-              <a:t>Ответ: </a:t>
-            </a:r>
-            <a:r>
-              <a:rPr lang="ru-RU" dirty="0"/>
-              <a:t>доп. канал в изображении RGBA, отвечающий за прозрачность пикселей</a:t>
-            </a:r>
-            <a:endParaRPr lang="ru-RU" b="1" dirty="0"/>
+              <a:t>11</a:t>
+            </a:r>
           </a:p>
         </p:txBody>
       </p:sp>
     </p:spTree>
     <p:extLst>
       <p:ext uri="{BB962C8B-B14F-4D97-AF65-F5344CB8AC3E}">
-        <p14:creationId xmlns:p14="http://schemas.microsoft.com/office/powerpoint/2010/main" val="560170823"/>
+        <p14:creationId xmlns:p14="http://schemas.microsoft.com/office/powerpoint/2010/main" val="1310525480"/>
       </p:ext>
     </p:extLst>
   </p:cSld>
@@ -6291,6 +6015,549 @@
       </p:grpSpPr>
       <p:sp>
         <p:nvSpPr>
+          <p:cNvPr id="5" name="TextBox 4">
+            <a:extLst>
+              <a:ext uri="{FF2B5EF4-FFF2-40B4-BE49-F238E27FC236}">
+                <a16:creationId xmlns:a16="http://schemas.microsoft.com/office/drawing/2014/main" id="{B41B6E55-C1E7-22C7-FFCB-604BB72C480D}"/>
+              </a:ext>
+            </a:extLst>
+          </p:cNvPr>
+          <p:cNvSpPr txBox="1"/>
+          <p:nvPr/>
+        </p:nvSpPr>
+        <p:spPr>
+          <a:xfrm>
+            <a:off x="1478764" y="448811"/>
+            <a:ext cx="9182101" cy="766047"/>
+          </a:xfrm>
+          <a:prstGeom prst="rect">
+            <a:avLst/>
+          </a:prstGeom>
+          <a:noFill/>
+        </p:spPr>
+        <p:txBody>
+          <a:bodyPr wrap="square" rtlCol="0" anchor="ctr">
+            <a:spAutoFit/>
+          </a:bodyPr>
+          <a:lstStyle/>
+          <a:p>
+            <a:r>
+              <a:rPr lang="ru-RU" sz="2800" b="1" dirty="0">
+                <a:latin typeface="+mj-lt"/>
+              </a:rPr>
+              <a:t>Контрольные вопросы</a:t>
+            </a:r>
+          </a:p>
+        </p:txBody>
+      </p:sp>
+      <p:sp>
+        <p:nvSpPr>
+          <p:cNvPr id="20" name="TextBox 19">
+            <a:extLst>
+              <a:ext uri="{FF2B5EF4-FFF2-40B4-BE49-F238E27FC236}">
+                <a16:creationId xmlns:a16="http://schemas.microsoft.com/office/drawing/2014/main" id="{71F5B869-FCA3-91D3-678D-F5E5BE3D9772}"/>
+              </a:ext>
+            </a:extLst>
+          </p:cNvPr>
+          <p:cNvSpPr txBox="1"/>
+          <p:nvPr/>
+        </p:nvSpPr>
+        <p:spPr>
+          <a:xfrm>
+            <a:off x="1487488" y="1024212"/>
+            <a:ext cx="9182106" cy="540739"/>
+          </a:xfrm>
+          <a:prstGeom prst="rect">
+            <a:avLst/>
+          </a:prstGeom>
+          <a:noFill/>
+        </p:spPr>
+        <p:txBody>
+          <a:bodyPr wrap="square" rtlCol="0" anchor="ctr">
+            <a:spAutoFit/>
+          </a:bodyPr>
+          <a:lstStyle/>
+          <a:p>
+            <a:pPr algn="just"/>
+            <a:r>
+              <a:rPr lang="ru-RU" b="1" dirty="0"/>
+              <a:t>1. Что такое пиксель и как он представлен в цветном изображении?</a:t>
+            </a:r>
+          </a:p>
+        </p:txBody>
+      </p:sp>
+      <p:sp>
+        <p:nvSpPr>
+          <p:cNvPr id="7" name="TextBox 6">
+            <a:extLst>
+              <a:ext uri="{FF2B5EF4-FFF2-40B4-BE49-F238E27FC236}">
+                <a16:creationId xmlns:a16="http://schemas.microsoft.com/office/drawing/2014/main" id="{D665E4DE-7D6B-49F6-7D70-49D3CC230020}"/>
+              </a:ext>
+            </a:extLst>
+          </p:cNvPr>
+          <p:cNvSpPr txBox="1"/>
+          <p:nvPr/>
+        </p:nvSpPr>
+        <p:spPr>
+          <a:xfrm>
+            <a:off x="1487488" y="1332946"/>
+            <a:ext cx="9182106" cy="946293"/>
+          </a:xfrm>
+          <a:prstGeom prst="rect">
+            <a:avLst/>
+          </a:prstGeom>
+          <a:noFill/>
+        </p:spPr>
+        <p:txBody>
+          <a:bodyPr wrap="square" rtlCol="0" anchor="ctr">
+            <a:spAutoFit/>
+          </a:bodyPr>
+          <a:lstStyle/>
+          <a:p>
+            <a:r>
+              <a:rPr lang="ru-RU" b="1" dirty="0"/>
+              <a:t>Ответ: </a:t>
+            </a:r>
+            <a:r>
+              <a:rPr lang="ru-RU" dirty="0"/>
+              <a:t>наименьший элемент цифрового изображения, содержащий информацию о яркости и цвете</a:t>
+            </a:r>
+            <a:endParaRPr lang="ru-RU" b="1" dirty="0"/>
+          </a:p>
+        </p:txBody>
+      </p:sp>
+      <p:sp>
+        <p:nvSpPr>
+          <p:cNvPr id="8" name="TextBox 7">
+            <a:extLst>
+              <a:ext uri="{FF2B5EF4-FFF2-40B4-BE49-F238E27FC236}">
+                <a16:creationId xmlns:a16="http://schemas.microsoft.com/office/drawing/2014/main" id="{22BCE2EF-1E4E-4104-5239-E6203734018B}"/>
+              </a:ext>
+            </a:extLst>
+          </p:cNvPr>
+          <p:cNvSpPr txBox="1"/>
+          <p:nvPr/>
+        </p:nvSpPr>
+        <p:spPr>
+          <a:xfrm>
+            <a:off x="1487488" y="2052466"/>
+            <a:ext cx="9182106" cy="540739"/>
+          </a:xfrm>
+          <a:prstGeom prst="rect">
+            <a:avLst/>
+          </a:prstGeom>
+          <a:noFill/>
+        </p:spPr>
+        <p:txBody>
+          <a:bodyPr wrap="square" rtlCol="0" anchor="ctr">
+            <a:spAutoFit/>
+          </a:bodyPr>
+          <a:lstStyle/>
+          <a:p>
+            <a:pPr algn="just"/>
+            <a:r>
+              <a:rPr lang="ru-RU" b="1" dirty="0"/>
+              <a:t>2. В чем разница между RGB и HSV?</a:t>
+            </a:r>
+          </a:p>
+        </p:txBody>
+      </p:sp>
+      <p:sp>
+        <p:nvSpPr>
+          <p:cNvPr id="9" name="TextBox 8">
+            <a:extLst>
+              <a:ext uri="{FF2B5EF4-FFF2-40B4-BE49-F238E27FC236}">
+                <a16:creationId xmlns:a16="http://schemas.microsoft.com/office/drawing/2014/main" id="{1B6288AE-09CC-5A07-59ED-90CC972FC3F3}"/>
+              </a:ext>
+            </a:extLst>
+          </p:cNvPr>
+          <p:cNvSpPr txBox="1"/>
+          <p:nvPr/>
+        </p:nvSpPr>
+        <p:spPr>
+          <a:xfrm>
+            <a:off x="1487488" y="2237875"/>
+            <a:ext cx="9182106" cy="1757402"/>
+          </a:xfrm>
+          <a:prstGeom prst="rect">
+            <a:avLst/>
+          </a:prstGeom>
+          <a:noFill/>
+        </p:spPr>
+        <p:txBody>
+          <a:bodyPr wrap="square" rtlCol="0" anchor="ctr">
+            <a:spAutoFit/>
+          </a:bodyPr>
+          <a:lstStyle/>
+          <a:p>
+            <a:r>
+              <a:rPr lang="ru-RU" b="1" dirty="0"/>
+              <a:t>Ответ: </a:t>
+            </a:r>
+            <a:r>
+              <a:rPr lang="en-US" dirty="0"/>
+              <a:t>RGB </a:t>
+            </a:r>
+            <a:r>
+              <a:rPr lang="ru-RU" dirty="0"/>
+              <a:t>основан на смешивании трёх основных цветов (красного, зеленого и синего) и является основным способом представления цветов на экране</a:t>
+            </a:r>
+            <a:r>
+              <a:rPr lang="en-US" dirty="0"/>
+              <a:t>; </a:t>
+            </a:r>
+            <a:r>
+              <a:rPr lang="ru-RU" dirty="0"/>
+              <a:t>в </a:t>
+            </a:r>
+            <a:r>
+              <a:rPr lang="en-US" dirty="0"/>
+              <a:t>HSV </a:t>
+            </a:r>
+            <a:r>
+              <a:rPr lang="ru-RU" dirty="0"/>
+              <a:t>цвета представлены через параметры </a:t>
+            </a:r>
+            <a:r>
+              <a:rPr lang="en-US" dirty="0"/>
+              <a:t>Hue (</a:t>
+            </a:r>
+            <a:r>
+              <a:rPr lang="ru-RU" dirty="0"/>
+              <a:t>цветовой тон)</a:t>
+            </a:r>
+            <a:r>
+              <a:rPr lang="en-US" dirty="0"/>
+              <a:t>, Saturation (</a:t>
+            </a:r>
+            <a:r>
+              <a:rPr lang="ru-RU" dirty="0"/>
+              <a:t>насыщенность) и </a:t>
+            </a:r>
+            <a:r>
+              <a:rPr lang="en-US" dirty="0"/>
+              <a:t>Value (</a:t>
+            </a:r>
+            <a:r>
+              <a:rPr lang="ru-RU" dirty="0"/>
+              <a:t>значение яркости), что удобно для обработки оттенков</a:t>
+            </a:r>
+            <a:endParaRPr lang="ru-RU" b="1" dirty="0"/>
+          </a:p>
+        </p:txBody>
+      </p:sp>
+      <p:sp>
+        <p:nvSpPr>
+          <p:cNvPr id="11" name="TextBox 10">
+            <a:extLst>
+              <a:ext uri="{FF2B5EF4-FFF2-40B4-BE49-F238E27FC236}">
+                <a16:creationId xmlns:a16="http://schemas.microsoft.com/office/drawing/2014/main" id="{BF6A8668-D6E4-5A1C-E82D-453FBC4EA553}"/>
+              </a:ext>
+            </a:extLst>
+          </p:cNvPr>
+          <p:cNvSpPr txBox="1"/>
+          <p:nvPr/>
+        </p:nvSpPr>
+        <p:spPr>
+          <a:xfrm>
+            <a:off x="1496217" y="3636327"/>
+            <a:ext cx="9164648" cy="540739"/>
+          </a:xfrm>
+          <a:prstGeom prst="rect">
+            <a:avLst/>
+          </a:prstGeom>
+          <a:noFill/>
+        </p:spPr>
+        <p:txBody>
+          <a:bodyPr wrap="square" rtlCol="0" anchor="ctr">
+            <a:spAutoFit/>
+          </a:bodyPr>
+          <a:lstStyle/>
+          <a:p>
+            <a:pPr algn="just"/>
+            <a:r>
+              <a:rPr lang="ru-RU" b="1" dirty="0"/>
+              <a:t>3. Как получить отдельный цветовой канал в </a:t>
+            </a:r>
+            <a:r>
+              <a:rPr lang="ru-RU" b="1" dirty="0" err="1"/>
+              <a:t>OpenCV</a:t>
+            </a:r>
+            <a:r>
+              <a:rPr lang="ru-RU" b="1" dirty="0"/>
+              <a:t>?</a:t>
+            </a:r>
+          </a:p>
+        </p:txBody>
+      </p:sp>
+      <p:sp>
+        <p:nvSpPr>
+          <p:cNvPr id="13" name="TextBox 12">
+            <a:extLst>
+              <a:ext uri="{FF2B5EF4-FFF2-40B4-BE49-F238E27FC236}">
+                <a16:creationId xmlns:a16="http://schemas.microsoft.com/office/drawing/2014/main" id="{6A0D2500-A0A1-8B4C-1976-D68650FD4B24}"/>
+              </a:ext>
+            </a:extLst>
+          </p:cNvPr>
+          <p:cNvSpPr txBox="1"/>
+          <p:nvPr/>
+        </p:nvSpPr>
+        <p:spPr>
+          <a:xfrm>
+            <a:off x="1487488" y="4008564"/>
+            <a:ext cx="9182106" cy="540739"/>
+          </a:xfrm>
+          <a:prstGeom prst="rect">
+            <a:avLst/>
+          </a:prstGeom>
+          <a:noFill/>
+        </p:spPr>
+        <p:txBody>
+          <a:bodyPr wrap="square" rtlCol="0" anchor="ctr">
+            <a:spAutoFit/>
+          </a:bodyPr>
+          <a:lstStyle/>
+          <a:p>
+            <a:r>
+              <a:rPr lang="ru-RU" b="1" dirty="0"/>
+              <a:t>Ответ: </a:t>
+            </a:r>
+            <a:r>
+              <a:rPr lang="ru-RU" dirty="0"/>
+              <a:t>с помощью функции разделения каналов </a:t>
+            </a:r>
+            <a:r>
+              <a:rPr lang="en-US" dirty="0"/>
+              <a:t>cv2.split()</a:t>
+            </a:r>
+            <a:endParaRPr lang="ru-RU" b="1" dirty="0"/>
+          </a:p>
+        </p:txBody>
+      </p:sp>
+      <p:sp>
+        <p:nvSpPr>
+          <p:cNvPr id="15" name="Номер слайда 14">
+            <a:extLst>
+              <a:ext uri="{FF2B5EF4-FFF2-40B4-BE49-F238E27FC236}">
+                <a16:creationId xmlns:a16="http://schemas.microsoft.com/office/drawing/2014/main" id="{E5B656E7-25A9-3B44-9104-A4F257D11ED5}"/>
+              </a:ext>
+            </a:extLst>
+          </p:cNvPr>
+          <p:cNvSpPr>
+            <a:spLocks noGrp="1"/>
+          </p:cNvSpPr>
+          <p:nvPr>
+            <p:ph type="sldNum" sz="quarter" idx="12"/>
+          </p:nvPr>
+        </p:nvSpPr>
+        <p:spPr/>
+        <p:txBody>
+          <a:bodyPr/>
+          <a:lstStyle/>
+          <a:p>
+            <a:r>
+              <a:rPr lang="ru-RU" dirty="0"/>
+              <a:t>12</a:t>
+            </a:r>
+          </a:p>
+        </p:txBody>
+      </p:sp>
+      <p:sp>
+        <p:nvSpPr>
+          <p:cNvPr id="16" name="TextBox 15">
+            <a:extLst>
+              <a:ext uri="{FF2B5EF4-FFF2-40B4-BE49-F238E27FC236}">
+                <a16:creationId xmlns:a16="http://schemas.microsoft.com/office/drawing/2014/main" id="{9FCB03C1-0B76-2E08-203C-12C1A8C68811}"/>
+              </a:ext>
+            </a:extLst>
+          </p:cNvPr>
+          <p:cNvSpPr txBox="1"/>
+          <p:nvPr/>
+        </p:nvSpPr>
+        <p:spPr>
+          <a:xfrm>
+            <a:off x="1478762" y="4377896"/>
+            <a:ext cx="9182106" cy="540739"/>
+          </a:xfrm>
+          <a:prstGeom prst="rect">
+            <a:avLst/>
+          </a:prstGeom>
+          <a:noFill/>
+        </p:spPr>
+        <p:txBody>
+          <a:bodyPr wrap="square" rtlCol="0" anchor="ctr">
+            <a:spAutoFit/>
+          </a:bodyPr>
+          <a:lstStyle/>
+          <a:p>
+            <a:pPr algn="just"/>
+            <a:r>
+              <a:rPr lang="ru-RU" b="1" dirty="0"/>
+              <a:t>4. Как преобразовать цветное изображение в градации серого?</a:t>
+            </a:r>
+          </a:p>
+        </p:txBody>
+      </p:sp>
+      <p:sp>
+        <p:nvSpPr>
+          <p:cNvPr id="17" name="TextBox 16">
+            <a:extLst>
+              <a:ext uri="{FF2B5EF4-FFF2-40B4-BE49-F238E27FC236}">
+                <a16:creationId xmlns:a16="http://schemas.microsoft.com/office/drawing/2014/main" id="{794C8A30-3803-DF2B-B667-815A58C44D49}"/>
+              </a:ext>
+            </a:extLst>
+          </p:cNvPr>
+          <p:cNvSpPr txBox="1"/>
+          <p:nvPr/>
+        </p:nvSpPr>
+        <p:spPr>
+          <a:xfrm>
+            <a:off x="1485893" y="4686657"/>
+            <a:ext cx="9167841" cy="946293"/>
+          </a:xfrm>
+          <a:prstGeom prst="rect">
+            <a:avLst/>
+          </a:prstGeom>
+          <a:noFill/>
+        </p:spPr>
+        <p:txBody>
+          <a:bodyPr wrap="square" rtlCol="0" anchor="ctr">
+            <a:spAutoFit/>
+          </a:bodyPr>
+          <a:lstStyle/>
+          <a:p>
+            <a:r>
+              <a:rPr lang="ru-RU" b="1" dirty="0"/>
+              <a:t>Ответ: </a:t>
+            </a:r>
+            <a:r>
+              <a:rPr lang="ru-RU" dirty="0"/>
+              <a:t>с помощью функции изменения цветового пространства </a:t>
+            </a:r>
+            <a:r>
+              <a:rPr lang="en-US" dirty="0"/>
+              <a:t>cv2.cvtColor() </a:t>
+            </a:r>
+            <a:r>
+              <a:rPr lang="ru-RU" dirty="0"/>
+              <a:t>с флагом </a:t>
+            </a:r>
+            <a:r>
+              <a:rPr lang="en-US" dirty="0"/>
+              <a:t>cv2.COLOR_BGR2GRAY</a:t>
+            </a:r>
+            <a:endParaRPr lang="ru-RU" b="1" dirty="0"/>
+          </a:p>
+        </p:txBody>
+      </p:sp>
+      <p:sp>
+        <p:nvSpPr>
+          <p:cNvPr id="18" name="TextBox 17">
+            <a:extLst>
+              <a:ext uri="{FF2B5EF4-FFF2-40B4-BE49-F238E27FC236}">
+                <a16:creationId xmlns:a16="http://schemas.microsoft.com/office/drawing/2014/main" id="{3C944073-96C3-A880-15BE-6FC4998BB818}"/>
+              </a:ext>
+            </a:extLst>
+          </p:cNvPr>
+          <p:cNvSpPr txBox="1"/>
+          <p:nvPr/>
+        </p:nvSpPr>
+        <p:spPr>
+          <a:xfrm>
+            <a:off x="1485893" y="5406150"/>
+            <a:ext cx="9159859" cy="540739"/>
+          </a:xfrm>
+          <a:prstGeom prst="rect">
+            <a:avLst/>
+          </a:prstGeom>
+          <a:noFill/>
+        </p:spPr>
+        <p:txBody>
+          <a:bodyPr wrap="square" rtlCol="0" anchor="ctr">
+            <a:spAutoFit/>
+          </a:bodyPr>
+          <a:lstStyle/>
+          <a:p>
+            <a:pPr algn="just"/>
+            <a:r>
+              <a:rPr lang="ru-RU" b="1" dirty="0"/>
+              <a:t>5. Что такое альфа-канал?</a:t>
+            </a:r>
+          </a:p>
+        </p:txBody>
+      </p:sp>
+      <p:sp>
+        <p:nvSpPr>
+          <p:cNvPr id="19" name="TextBox 18">
+            <a:extLst>
+              <a:ext uri="{FF2B5EF4-FFF2-40B4-BE49-F238E27FC236}">
+                <a16:creationId xmlns:a16="http://schemas.microsoft.com/office/drawing/2014/main" id="{0D9D7265-9BC1-3DE0-6747-8C9EA0B1A37E}"/>
+              </a:ext>
+            </a:extLst>
+          </p:cNvPr>
+          <p:cNvSpPr txBox="1"/>
+          <p:nvPr/>
+        </p:nvSpPr>
+        <p:spPr>
+          <a:xfrm>
+            <a:off x="1485893" y="5775482"/>
+            <a:ext cx="9167841" cy="540739"/>
+          </a:xfrm>
+          <a:prstGeom prst="rect">
+            <a:avLst/>
+          </a:prstGeom>
+          <a:noFill/>
+        </p:spPr>
+        <p:txBody>
+          <a:bodyPr wrap="square" rtlCol="0" anchor="ctr">
+            <a:spAutoFit/>
+          </a:bodyPr>
+          <a:lstStyle/>
+          <a:p>
+            <a:r>
+              <a:rPr lang="ru-RU" b="1" dirty="0"/>
+              <a:t>Ответ: </a:t>
+            </a:r>
+            <a:r>
+              <a:rPr lang="ru-RU" dirty="0"/>
+              <a:t>доп. канал в изображении RGBA, отвечающий за прозрачность пикселей</a:t>
+            </a:r>
+            <a:endParaRPr lang="ru-RU" b="1" dirty="0"/>
+          </a:p>
+        </p:txBody>
+      </p:sp>
+    </p:spTree>
+    <p:extLst>
+      <p:ext uri="{BB962C8B-B14F-4D97-AF65-F5344CB8AC3E}">
+        <p14:creationId xmlns:p14="http://schemas.microsoft.com/office/powerpoint/2010/main" val="560170823"/>
+      </p:ext>
+    </p:extLst>
+  </p:cSld>
+  <p:clrMapOvr>
+    <a:masterClrMapping/>
+  </p:clrMapOvr>
+</p:sld>
+</file>
+
+<file path=ppt/slides/slide18.xml><?xml version="1.0" encoding="utf-8"?>
+<p:sld xmlns:a="http://schemas.openxmlformats.org/drawingml/2006/main" xmlns:r="http://schemas.openxmlformats.org/officeDocument/2006/relationships" xmlns:p="http://schemas.openxmlformats.org/presentationml/2006/main">
+  <p:cSld>
+    <p:spTree>
+      <p:nvGrpSpPr>
+        <p:cNvPr id="1" name=""/>
+        <p:cNvGrpSpPr/>
+        <p:nvPr/>
+      </p:nvGrpSpPr>
+      <p:grpSpPr>
+        <a:xfrm>
+          <a:off x="0" y="0"/>
+          <a:ext cx="0" cy="0"/>
+          <a:chOff x="0" y="0"/>
+          <a:chExt cx="0" cy="0"/>
+        </a:xfrm>
+      </p:grpSpPr>
+      <p:sp>
+        <p:nvSpPr>
           <p:cNvPr id="2" name="Заголовок 1">
             <a:extLst>
               <a:ext uri="{FF2B5EF4-FFF2-40B4-BE49-F238E27FC236}">
@@ -6346,7 +6613,7 @@
           <a:p>
             <a:fld id="{89A371D6-626E-4711-87E0-599E0F8A4C97}" type="slidenum">
               <a:rPr lang="ru-RU" smtClean="0"/>
-              <a:t>17</a:t>
+              <a:t>18</a:t>
             </a:fld>
             <a:endParaRPr lang="ru-RU"/>
           </a:p>
@@ -6414,7 +6681,7 @@
               <a:rPr lang="ru-RU" sz="2800" b="1" dirty="0">
                 <a:latin typeface="+mj-lt"/>
               </a:rPr>
-              <a:t>Задание 1. Загрузить цветное изображение</a:t>
+              <a:t>Подготовка к работе: импорт библиотек</a:t>
             </a:r>
           </a:p>
         </p:txBody>
@@ -6433,8 +6700,8 @@
         </p:nvSpPr>
         <p:spPr>
           <a:xfrm>
-            <a:off x="1485899" y="1540983"/>
-            <a:ext cx="9212779" cy="707886"/>
+            <a:off x="1485899" y="1387094"/>
+            <a:ext cx="9182101" cy="1015663"/>
           </a:xfrm>
           <a:prstGeom prst="rect">
             <a:avLst/>
@@ -6449,7 +6716,27 @@
           <a:p>
             <a:r>
               <a:rPr lang="ru-RU" sz="2000" dirty="0"/>
-              <a:t>Суть задания: считывание файла с диска и представление изображения в виде трёхмерной матрицы чисел в цветовой модели BGR</a:t>
+              <a:t>Импортируем необходимые для работы библиотеки </a:t>
+            </a:r>
+            <a:r>
+              <a:rPr lang="en-US" sz="2000" dirty="0" err="1"/>
+              <a:t>Numpy</a:t>
+            </a:r>
+            <a:r>
+              <a:rPr lang="en-US" sz="2000" dirty="0"/>
+              <a:t>, OpenCV, </a:t>
+            </a:r>
+            <a:r>
+              <a:rPr lang="en-US" sz="2000" dirty="0" err="1"/>
+              <a:t>Pyplot</a:t>
+            </a:r>
+            <a:r>
+              <a:rPr lang="en-US" sz="2000" dirty="0"/>
+              <a:t> </a:t>
+            </a:r>
+            <a:r>
+              <a:rPr lang="ru-RU" sz="2000" dirty="0"/>
+              <a:t>и определяем вспомогательную функцию для отображения картинок на выводе.</a:t>
             </a:r>
           </a:p>
         </p:txBody>
@@ -6468,7 +6755,7 @@
         </p:nvSpPr>
         <p:spPr>
           <a:xfrm>
-            <a:off x="1493321" y="2700893"/>
+            <a:off x="3994084" y="2700892"/>
             <a:ext cx="4203831" cy="369332"/>
           </a:xfrm>
           <a:prstGeom prst="rect">
@@ -6492,46 +6779,39 @@
       </p:sp>
       <p:sp>
         <p:nvSpPr>
-          <p:cNvPr id="28" name="TextBox 27">
-            <a:extLst>
-              <a:ext uri="{FF2B5EF4-FFF2-40B4-BE49-F238E27FC236}">
-                <a16:creationId xmlns:a16="http://schemas.microsoft.com/office/drawing/2014/main" id="{7652C659-39B1-B693-6C90-EC889EECEA23}"/>
-              </a:ext>
-            </a:extLst>
-          </p:cNvPr>
-          <p:cNvSpPr txBox="1"/>
-          <p:nvPr/>
-        </p:nvSpPr>
-        <p:spPr>
-          <a:xfrm>
-            <a:off x="6088579" y="2700893"/>
-            <a:ext cx="4610100" cy="369332"/>
-          </a:xfrm>
-          <a:prstGeom prst="rect">
-            <a:avLst/>
-          </a:prstGeom>
-          <a:noFill/>
-        </p:spPr>
-        <p:txBody>
-          <a:bodyPr wrap="square" rtlCol="0" anchor="ctr">
-            <a:spAutoFit/>
-          </a:bodyPr>
-          <a:lstStyle/>
-          <a:p>
-            <a:pPr algn="ctr"/>
-            <a:r>
-              <a:rPr lang="ru-RU" b="1" dirty="0"/>
-              <a:t>Вывод:</a:t>
-            </a:r>
+          <p:cNvPr id="7" name="Номер слайда 6">
+            <a:extLst>
+              <a:ext uri="{FF2B5EF4-FFF2-40B4-BE49-F238E27FC236}">
+                <a16:creationId xmlns:a16="http://schemas.microsoft.com/office/drawing/2014/main" id="{D024ECB0-4347-288D-3116-357235DC7F95}"/>
+              </a:ext>
+            </a:extLst>
+          </p:cNvPr>
+          <p:cNvSpPr>
+            <a:spLocks noGrp="1"/>
+          </p:cNvSpPr>
+          <p:nvPr>
+            <p:ph type="sldNum" sz="quarter" idx="12"/>
+          </p:nvPr>
+        </p:nvSpPr>
+        <p:spPr/>
+        <p:txBody>
+          <a:bodyPr/>
+          <a:lstStyle/>
+          <a:p>
+            <a:fld id="{89A371D6-626E-4711-87E0-599E0F8A4C97}" type="slidenum">
+              <a:rPr lang="ru-RU" smtClean="0"/>
+              <a:t>2</a:t>
+            </a:fld>
+            <a:endParaRPr lang="ru-RU"/>
           </a:p>
         </p:txBody>
       </p:sp>
       <p:pic>
         <p:nvPicPr>
-          <p:cNvPr id="30" name="Рисунок 29">
-            <a:extLst>
-              <a:ext uri="{FF2B5EF4-FFF2-40B4-BE49-F238E27FC236}">
-                <a16:creationId xmlns:a16="http://schemas.microsoft.com/office/drawing/2014/main" id="{42E46308-EE73-99FB-4EC5-447659A2F33F}"/>
+          <p:cNvPr id="4" name="Рисунок 3">
+            <a:extLst>
+              <a:ext uri="{FF2B5EF4-FFF2-40B4-BE49-F238E27FC236}">
+                <a16:creationId xmlns:a16="http://schemas.microsoft.com/office/drawing/2014/main" id="{091C1D47-8E20-760E-5B2A-465A63CE84CA}"/>
               </a:ext>
             </a:extLst>
           </p:cNvPr>
@@ -6548,8 +6828,8 @@
         </p:blipFill>
         <p:spPr>
           <a:xfrm>
-            <a:off x="6088579" y="3070225"/>
-            <a:ext cx="4579421" cy="3238500"/>
+            <a:off x="3994084" y="3070224"/>
+            <a:ext cx="4203831" cy="2400681"/>
           </a:xfrm>
           <a:prstGeom prst="rect">
             <a:avLst/>
@@ -6558,10 +6838,10 @@
       </p:pic>
       <p:pic>
         <p:nvPicPr>
-          <p:cNvPr id="32" name="Рисунок 31">
-            <a:extLst>
-              <a:ext uri="{FF2B5EF4-FFF2-40B4-BE49-F238E27FC236}">
-                <a16:creationId xmlns:a16="http://schemas.microsoft.com/office/drawing/2014/main" id="{AD82592F-C9E4-8993-8390-BF5295771C1C}"/>
+          <p:cNvPr id="8" name="Рисунок 7">
+            <a:extLst>
+              <a:ext uri="{FF2B5EF4-FFF2-40B4-BE49-F238E27FC236}">
+                <a16:creationId xmlns:a16="http://schemas.microsoft.com/office/drawing/2014/main" id="{738DFBA8-B075-C2B1-D7A9-5ECAC67E74A2}"/>
               </a:ext>
             </a:extLst>
           </p:cNvPr>
@@ -6572,81 +6852,23 @@
         </p:nvPicPr>
         <p:blipFill>
           <a:blip r:embed="rId3"/>
-          <a:srcRect b="47280"/>
+          <a:srcRect l="14717" r="43573"/>
           <a:stretch/>
         </p:blipFill>
         <p:spPr>
           <a:xfrm>
-            <a:off x="1485899" y="4413948"/>
-            <a:ext cx="4209527" cy="1894777"/>
+            <a:off x="3986656" y="5470904"/>
+            <a:ext cx="4211259" cy="843617"/>
           </a:xfrm>
           <a:prstGeom prst="rect">
             <a:avLst/>
           </a:prstGeom>
         </p:spPr>
       </p:pic>
-      <p:pic>
-        <p:nvPicPr>
-          <p:cNvPr id="6" name="Рисунок 5">
-            <a:extLst>
-              <a:ext uri="{FF2B5EF4-FFF2-40B4-BE49-F238E27FC236}">
-                <a16:creationId xmlns:a16="http://schemas.microsoft.com/office/drawing/2014/main" id="{777C412D-6EBA-0A0C-742A-B854CC94F195}"/>
-              </a:ext>
-            </a:extLst>
-          </p:cNvPr>
-          <p:cNvPicPr>
-            <a:picLocks noChangeAspect="1"/>
-          </p:cNvPicPr>
-          <p:nvPr/>
-        </p:nvPicPr>
-        <p:blipFill>
-          <a:blip r:embed="rId4"/>
-          <a:srcRect b="10904"/>
-          <a:stretch/>
-        </p:blipFill>
-        <p:spPr>
-          <a:xfrm>
-            <a:off x="1485899" y="3070225"/>
-            <a:ext cx="4203831" cy="1298014"/>
-          </a:xfrm>
-          <a:prstGeom prst="rect">
-            <a:avLst/>
-          </a:prstGeom>
-        </p:spPr>
-      </p:pic>
-      <p:sp>
-        <p:nvSpPr>
-          <p:cNvPr id="7" name="Номер слайда 6">
-            <a:extLst>
-              <a:ext uri="{FF2B5EF4-FFF2-40B4-BE49-F238E27FC236}">
-                <a16:creationId xmlns:a16="http://schemas.microsoft.com/office/drawing/2014/main" id="{D024ECB0-4347-288D-3116-357235DC7F95}"/>
-              </a:ext>
-            </a:extLst>
-          </p:cNvPr>
-          <p:cNvSpPr>
-            <a:spLocks noGrp="1"/>
-          </p:cNvSpPr>
-          <p:nvPr>
-            <p:ph type="sldNum" sz="quarter" idx="12"/>
-          </p:nvPr>
-        </p:nvSpPr>
-        <p:spPr/>
-        <p:txBody>
-          <a:bodyPr/>
-          <a:lstStyle/>
-          <a:p>
-            <a:fld id="{89A371D6-626E-4711-87E0-599E0F8A4C97}" type="slidenum">
-              <a:rPr lang="ru-RU" smtClean="0"/>
-              <a:t>2</a:t>
-            </a:fld>
-            <a:endParaRPr lang="ru-RU"/>
-          </a:p>
-        </p:txBody>
-      </p:sp>
     </p:spTree>
     <p:extLst>
       <p:ext uri="{BB962C8B-B14F-4D97-AF65-F5344CB8AC3E}">
-        <p14:creationId xmlns:p14="http://schemas.microsoft.com/office/powerpoint/2010/main" val="2034063058"/>
+        <p14:creationId xmlns:p14="http://schemas.microsoft.com/office/powerpoint/2010/main" val="1074735894"/>
       </p:ext>
     </p:extLst>
   </p:cSld>
@@ -6687,8 +6909,8 @@
         </p:nvSpPr>
         <p:spPr>
           <a:xfrm>
-            <a:off x="1482190" y="549275"/>
-            <a:ext cx="9212778" cy="1384995"/>
+            <a:off x="1485899" y="565739"/>
+            <a:ext cx="9212778" cy="523220"/>
           </a:xfrm>
           <a:prstGeom prst="rect">
             <a:avLst/>
@@ -6705,7 +6927,7 @@
               <a:rPr lang="ru-RU" sz="2800" b="1" dirty="0">
                 <a:latin typeface="+mj-lt"/>
               </a:rPr>
-              <a:t>Задание 2. Преобразовать изображение в градации серого и вывести минимальное и максимальное значение пикселей</a:t>
+              <a:t>Задание 1. Загрузить цветное изображение</a:t>
             </a:r>
           </a:p>
         </p:txBody>
@@ -6724,7 +6946,7 @@
         </p:nvSpPr>
         <p:spPr>
           <a:xfrm>
-            <a:off x="1482189" y="1963638"/>
+            <a:off x="1485899" y="1540983"/>
             <a:ext cx="9212779" cy="707886"/>
           </a:xfrm>
           <a:prstGeom prst="rect">
@@ -6740,7 +6962,7 @@
           <a:p>
             <a:r>
               <a:rPr lang="ru-RU" sz="2000" dirty="0"/>
-              <a:t>Суть задания: снижение размерности данных с трёх каналов до одного (яркостного) и оценка динамического диапазона освещённости сцены</a:t>
+              <a:t>Суть задания: считывание файла с диска и представление изображения в виде трёхмерной матрицы чисел в цветовой модели BGR</a:t>
             </a:r>
           </a:p>
         </p:txBody>
@@ -6759,8 +6981,8 @@
         </p:nvSpPr>
         <p:spPr>
           <a:xfrm>
-            <a:off x="1485900" y="2700893"/>
-            <a:ext cx="4173803" cy="369332"/>
+            <a:off x="1493321" y="2700893"/>
+            <a:ext cx="4203831" cy="369332"/>
           </a:xfrm>
           <a:prstGeom prst="rect">
             <a:avLst/>
@@ -6819,10 +7041,10 @@
       </p:sp>
       <p:pic>
         <p:nvPicPr>
-          <p:cNvPr id="6" name="Рисунок 5">
-            <a:extLst>
-              <a:ext uri="{FF2B5EF4-FFF2-40B4-BE49-F238E27FC236}">
-                <a16:creationId xmlns:a16="http://schemas.microsoft.com/office/drawing/2014/main" id="{615BDC36-B520-D97F-328F-8FE1B14AA8FA}"/>
+          <p:cNvPr id="30" name="Рисунок 29">
+            <a:extLst>
+              <a:ext uri="{FF2B5EF4-FFF2-40B4-BE49-F238E27FC236}">
+                <a16:creationId xmlns:a16="http://schemas.microsoft.com/office/drawing/2014/main" id="{42E46308-EE73-99FB-4EC5-447659A2F33F}"/>
               </a:ext>
             </a:extLst>
           </p:cNvPr>
@@ -6839,8 +7061,8 @@
         </p:blipFill>
         <p:spPr>
           <a:xfrm>
-            <a:off x="1482189" y="3070225"/>
-            <a:ext cx="4177514" cy="2207660"/>
+            <a:off x="6088579" y="3070225"/>
+            <a:ext cx="4579421" cy="3238500"/>
           </a:xfrm>
           <a:prstGeom prst="rect">
             <a:avLst/>
@@ -6849,10 +7071,10 @@
       </p:pic>
       <p:pic>
         <p:nvPicPr>
-          <p:cNvPr id="8" name="Рисунок 7">
-            <a:extLst>
-              <a:ext uri="{FF2B5EF4-FFF2-40B4-BE49-F238E27FC236}">
-                <a16:creationId xmlns:a16="http://schemas.microsoft.com/office/drawing/2014/main" id="{99982C5E-5066-C92A-69EA-FF15E6514E69}"/>
+          <p:cNvPr id="32" name="Рисунок 31">
+            <a:extLst>
+              <a:ext uri="{FF2B5EF4-FFF2-40B4-BE49-F238E27FC236}">
+                <a16:creationId xmlns:a16="http://schemas.microsoft.com/office/drawing/2014/main" id="{AD82592F-C9E4-8993-8390-BF5295771C1C}"/>
               </a:ext>
             </a:extLst>
           </p:cNvPr>
@@ -6863,62 +7085,25 @@
         </p:nvPicPr>
         <p:blipFill>
           <a:blip r:embed="rId3"/>
-          <a:stretch>
-            <a:fillRect/>
-          </a:stretch>
+          <a:srcRect b="47280"/>
+          <a:stretch/>
         </p:blipFill>
         <p:spPr>
           <a:xfrm>
-            <a:off x="1485900" y="5647217"/>
-            <a:ext cx="4173803" cy="661508"/>
+            <a:off x="1485899" y="4413948"/>
+            <a:ext cx="4209527" cy="1894777"/>
           </a:xfrm>
           <a:prstGeom prst="rect">
             <a:avLst/>
           </a:prstGeom>
         </p:spPr>
       </p:pic>
-      <p:sp>
-        <p:nvSpPr>
-          <p:cNvPr id="11" name="TextBox 10">
-            <a:extLst>
-              <a:ext uri="{FF2B5EF4-FFF2-40B4-BE49-F238E27FC236}">
-                <a16:creationId xmlns:a16="http://schemas.microsoft.com/office/drawing/2014/main" id="{E5EF9D50-7263-2AE5-281E-5AE59038C9F9}"/>
-              </a:ext>
-            </a:extLst>
-          </p:cNvPr>
-          <p:cNvSpPr txBox="1"/>
-          <p:nvPr/>
-        </p:nvSpPr>
-        <p:spPr>
-          <a:xfrm>
-            <a:off x="1482189" y="5277885"/>
-            <a:ext cx="4173803" cy="369332"/>
-          </a:xfrm>
-          <a:prstGeom prst="rect">
-            <a:avLst/>
-          </a:prstGeom>
-          <a:noFill/>
-        </p:spPr>
-        <p:txBody>
-          <a:bodyPr wrap="square" rtlCol="0" anchor="ctr">
-            <a:spAutoFit/>
-          </a:bodyPr>
-          <a:lstStyle/>
-          <a:p>
-            <a:pPr algn="ctr"/>
-            <a:r>
-              <a:rPr lang="ru-RU" b="1" dirty="0"/>
-              <a:t>Терминал:</a:t>
-            </a:r>
-          </a:p>
-        </p:txBody>
-      </p:sp>
       <p:pic>
         <p:nvPicPr>
-          <p:cNvPr id="13" name="Рисунок 12">
-            <a:extLst>
-              <a:ext uri="{FF2B5EF4-FFF2-40B4-BE49-F238E27FC236}">
-                <a16:creationId xmlns:a16="http://schemas.microsoft.com/office/drawing/2014/main" id="{14C42DD7-4A1B-907C-90BC-805F77349DA1}"/>
+          <p:cNvPr id="6" name="Рисунок 5">
+            <a:extLst>
+              <a:ext uri="{FF2B5EF4-FFF2-40B4-BE49-F238E27FC236}">
+                <a16:creationId xmlns:a16="http://schemas.microsoft.com/office/drawing/2014/main" id="{777C412D-6EBA-0A0C-742A-B854CC94F195}"/>
               </a:ext>
             </a:extLst>
           </p:cNvPr>
@@ -6929,14 +7114,13 @@
         </p:nvPicPr>
         <p:blipFill>
           <a:blip r:embed="rId4"/>
-          <a:stretch>
-            <a:fillRect/>
-          </a:stretch>
+          <a:srcRect b="10904"/>
+          <a:stretch/>
         </p:blipFill>
         <p:spPr>
           <a:xfrm>
-            <a:off x="6084868" y="3070225"/>
-            <a:ext cx="4583132" cy="3238500"/>
+            <a:off x="1485899" y="3070225"/>
+            <a:ext cx="4203831" cy="1298014"/>
           </a:xfrm>
           <a:prstGeom prst="rect">
             <a:avLst/>
@@ -6945,10 +7129,10 @@
       </p:pic>
       <p:sp>
         <p:nvSpPr>
-          <p:cNvPr id="14" name="Номер слайда 13">
-            <a:extLst>
-              <a:ext uri="{FF2B5EF4-FFF2-40B4-BE49-F238E27FC236}">
-                <a16:creationId xmlns:a16="http://schemas.microsoft.com/office/drawing/2014/main" id="{E68AB01A-8F4E-E197-5EE4-ADA4BA8CC9A1}"/>
+          <p:cNvPr id="7" name="Номер слайда 6">
+            <a:extLst>
+              <a:ext uri="{FF2B5EF4-FFF2-40B4-BE49-F238E27FC236}">
+                <a16:creationId xmlns:a16="http://schemas.microsoft.com/office/drawing/2014/main" id="{D024ECB0-4347-288D-3116-357235DC7F95}"/>
               </a:ext>
             </a:extLst>
           </p:cNvPr>
@@ -6975,7 +7159,7 @@
     </p:spTree>
     <p:extLst>
       <p:ext uri="{BB962C8B-B14F-4D97-AF65-F5344CB8AC3E}">
-        <p14:creationId xmlns:p14="http://schemas.microsoft.com/office/powerpoint/2010/main" val="2412595500"/>
+        <p14:creationId xmlns:p14="http://schemas.microsoft.com/office/powerpoint/2010/main" val="2034063058"/>
       </p:ext>
     </p:extLst>
   </p:cSld>
@@ -7017,7 +7201,7 @@
         <p:spPr>
           <a:xfrm>
             <a:off x="1482190" y="549275"/>
-            <a:ext cx="9185810" cy="954107"/>
+            <a:ext cx="9212778" cy="1384995"/>
           </a:xfrm>
           <a:prstGeom prst="rect">
             <a:avLst/>
@@ -7034,29 +7218,17 @@
               <a:rPr lang="ru-RU" sz="2800" b="1" dirty="0">
                 <a:latin typeface="+mj-lt"/>
               </a:rPr>
-              <a:t>Задание 3. Преобразовать изображение в </a:t>
-            </a:r>
-            <a:r>
-              <a:rPr lang="ru-RU" sz="2800" b="1" dirty="0" err="1">
-                <a:latin typeface="+mj-lt"/>
-              </a:rPr>
-              <a:t>YCrCb</a:t>
-            </a:r>
-            <a:r>
-              <a:rPr lang="ru-RU" sz="2800" b="1" dirty="0">
-                <a:latin typeface="+mj-lt"/>
-              </a:rPr>
-              <a:t> и вывести отдельные каналы</a:t>
-            </a:r>
-          </a:p>
-        </p:txBody>
-      </p:sp>
-      <p:sp>
-        <p:nvSpPr>
-          <p:cNvPr id="21" name="TextBox 20">
-            <a:extLst>
-              <a:ext uri="{FF2B5EF4-FFF2-40B4-BE49-F238E27FC236}">
-                <a16:creationId xmlns:a16="http://schemas.microsoft.com/office/drawing/2014/main" id="{0C569071-A5F8-E7C9-1DC2-DF3EA9F88597}"/>
+              <a:t>Задание 2. Преобразовать изображение в градации серого и вывести минимальное и максимальное значение пикселей</a:t>
+            </a:r>
+          </a:p>
+        </p:txBody>
+      </p:sp>
+      <p:sp>
+        <p:nvSpPr>
+          <p:cNvPr id="20" name="TextBox 19">
+            <a:extLst>
+              <a:ext uri="{FF2B5EF4-FFF2-40B4-BE49-F238E27FC236}">
+                <a16:creationId xmlns:a16="http://schemas.microsoft.com/office/drawing/2014/main" id="{71F5B869-FCA3-91D3-678D-F5E5BE3D9772}"/>
               </a:ext>
             </a:extLst>
           </p:cNvPr>
@@ -7065,8 +7237,8 @@
         </p:nvSpPr>
         <p:spPr>
           <a:xfrm>
-            <a:off x="1485900" y="2700893"/>
-            <a:ext cx="4173803" cy="369332"/>
+            <a:off x="1482189" y="1963638"/>
+            <a:ext cx="9212779" cy="707886"/>
           </a:xfrm>
           <a:prstGeom prst="rect">
             <a:avLst/>
@@ -7079,20 +7251,19 @@
           </a:bodyPr>
           <a:lstStyle/>
           <a:p>
-            <a:pPr algn="ctr"/>
-            <a:r>
-              <a:rPr lang="ru-RU" b="1" dirty="0"/>
-              <a:t>Код:</a:t>
-            </a:r>
-          </a:p>
-        </p:txBody>
-      </p:sp>
-      <p:sp>
-        <p:nvSpPr>
-          <p:cNvPr id="28" name="TextBox 27">
-            <a:extLst>
-              <a:ext uri="{FF2B5EF4-FFF2-40B4-BE49-F238E27FC236}">
-                <a16:creationId xmlns:a16="http://schemas.microsoft.com/office/drawing/2014/main" id="{7652C659-39B1-B693-6C90-EC889EECEA23}"/>
+            <a:r>
+              <a:rPr lang="ru-RU" sz="2000" dirty="0"/>
+              <a:t>Суть задания: снижение размерности данных с трёх каналов до одного (яркостного) и оценка динамического диапазона освещённости сцены</a:t>
+            </a:r>
+          </a:p>
+        </p:txBody>
+      </p:sp>
+      <p:sp>
+        <p:nvSpPr>
+          <p:cNvPr id="21" name="TextBox 20">
+            <a:extLst>
+              <a:ext uri="{FF2B5EF4-FFF2-40B4-BE49-F238E27FC236}">
+                <a16:creationId xmlns:a16="http://schemas.microsoft.com/office/drawing/2014/main" id="{0C569071-A5F8-E7C9-1DC2-DF3EA9F88597}"/>
               </a:ext>
             </a:extLst>
           </p:cNvPr>
@@ -7101,8 +7272,8 @@
         </p:nvSpPr>
         <p:spPr>
           <a:xfrm>
-            <a:off x="6057900" y="2703199"/>
-            <a:ext cx="4610100" cy="369332"/>
+            <a:off x="1485900" y="2700893"/>
+            <a:ext cx="4173803" cy="369332"/>
           </a:xfrm>
           <a:prstGeom prst="rect">
             <a:avLst/>
@@ -7118,6 +7289,42 @@
             <a:pPr algn="ctr"/>
             <a:r>
               <a:rPr lang="ru-RU" b="1" dirty="0"/>
+              <a:t>Код:</a:t>
+            </a:r>
+          </a:p>
+        </p:txBody>
+      </p:sp>
+      <p:sp>
+        <p:nvSpPr>
+          <p:cNvPr id="28" name="TextBox 27">
+            <a:extLst>
+              <a:ext uri="{FF2B5EF4-FFF2-40B4-BE49-F238E27FC236}">
+                <a16:creationId xmlns:a16="http://schemas.microsoft.com/office/drawing/2014/main" id="{7652C659-39B1-B693-6C90-EC889EECEA23}"/>
+              </a:ext>
+            </a:extLst>
+          </p:cNvPr>
+          <p:cNvSpPr txBox="1"/>
+          <p:nvPr/>
+        </p:nvSpPr>
+        <p:spPr>
+          <a:xfrm>
+            <a:off x="6088579" y="2700893"/>
+            <a:ext cx="4610100" cy="369332"/>
+          </a:xfrm>
+          <a:prstGeom prst="rect">
+            <a:avLst/>
+          </a:prstGeom>
+          <a:noFill/>
+        </p:spPr>
+        <p:txBody>
+          <a:bodyPr wrap="square" rtlCol="0" anchor="ctr">
+            <a:spAutoFit/>
+          </a:bodyPr>
+          <a:lstStyle/>
+          <a:p>
+            <a:pPr algn="ctr"/>
+            <a:r>
+              <a:rPr lang="ru-RU" b="1" dirty="0"/>
               <a:t>Вывод:</a:t>
             </a:r>
           </a:p>
@@ -7125,10 +7332,10 @@
       </p:sp>
       <p:pic>
         <p:nvPicPr>
-          <p:cNvPr id="7" name="Рисунок 6">
-            <a:extLst>
-              <a:ext uri="{FF2B5EF4-FFF2-40B4-BE49-F238E27FC236}">
-                <a16:creationId xmlns:a16="http://schemas.microsoft.com/office/drawing/2014/main" id="{C113972E-B628-2140-FDB2-37D962BD4600}"/>
+          <p:cNvPr id="6" name="Рисунок 5">
+            <a:extLst>
+              <a:ext uri="{FF2B5EF4-FFF2-40B4-BE49-F238E27FC236}">
+                <a16:creationId xmlns:a16="http://schemas.microsoft.com/office/drawing/2014/main" id="{615BDC36-B520-D97F-328F-8FE1B14AA8FA}"/>
               </a:ext>
             </a:extLst>
           </p:cNvPr>
@@ -7139,13 +7346,14 @@
         </p:nvPicPr>
         <p:blipFill>
           <a:blip r:embed="rId2"/>
-          <a:srcRect r="69357"/>
-          <a:stretch/>
+          <a:stretch>
+            <a:fillRect/>
+          </a:stretch>
         </p:blipFill>
         <p:spPr>
           <a:xfrm>
-            <a:off x="6095999" y="3066902"/>
-            <a:ext cx="4572000" cy="3241823"/>
+            <a:off x="1482189" y="3070225"/>
+            <a:ext cx="4177514" cy="2207660"/>
           </a:xfrm>
           <a:prstGeom prst="rect">
             <a:avLst/>
@@ -7154,10 +7362,10 @@
       </p:pic>
       <p:pic>
         <p:nvPicPr>
-          <p:cNvPr id="10" name="Рисунок 9">
-            <a:extLst>
-              <a:ext uri="{FF2B5EF4-FFF2-40B4-BE49-F238E27FC236}">
-                <a16:creationId xmlns:a16="http://schemas.microsoft.com/office/drawing/2014/main" id="{47E70602-039E-5B0E-9198-712C025B25CB}"/>
+          <p:cNvPr id="8" name="Рисунок 7">
+            <a:extLst>
+              <a:ext uri="{FF2B5EF4-FFF2-40B4-BE49-F238E27FC236}">
+                <a16:creationId xmlns:a16="http://schemas.microsoft.com/office/drawing/2014/main" id="{99982C5E-5066-C92A-69EA-FF15E6514E69}"/>
               </a:ext>
             </a:extLst>
           </p:cNvPr>
@@ -7174,8 +7382,8 @@
         </p:blipFill>
         <p:spPr>
           <a:xfrm>
-            <a:off x="1487488" y="3066902"/>
-            <a:ext cx="4172215" cy="3241823"/>
+            <a:off x="1485900" y="5647217"/>
+            <a:ext cx="4173803" cy="661508"/>
           </a:xfrm>
           <a:prstGeom prst="rect">
             <a:avLst/>
@@ -7184,10 +7392,10 @@
       </p:pic>
       <p:sp>
         <p:nvSpPr>
-          <p:cNvPr id="12" name="TextBox 11">
-            <a:extLst>
-              <a:ext uri="{FF2B5EF4-FFF2-40B4-BE49-F238E27FC236}">
-                <a16:creationId xmlns:a16="http://schemas.microsoft.com/office/drawing/2014/main" id="{5E081176-D1EE-00B4-D512-DF4558557F77}"/>
+          <p:cNvPr id="11" name="TextBox 10">
+            <a:extLst>
+              <a:ext uri="{FF2B5EF4-FFF2-40B4-BE49-F238E27FC236}">
+                <a16:creationId xmlns:a16="http://schemas.microsoft.com/office/drawing/2014/main" id="{E5EF9D50-7263-2AE5-281E-5AE59038C9F9}"/>
               </a:ext>
             </a:extLst>
           </p:cNvPr>
@@ -7196,8 +7404,8 @@
         </p:nvSpPr>
         <p:spPr>
           <a:xfrm>
-            <a:off x="1489610" y="1747042"/>
-            <a:ext cx="9212779" cy="707886"/>
+            <a:off x="1482189" y="5277885"/>
+            <a:ext cx="4173803" cy="369332"/>
           </a:xfrm>
           <a:prstGeom prst="rect">
             <a:avLst/>
@@ -7210,40 +7418,50 @@
           </a:bodyPr>
           <a:lstStyle/>
           <a:p>
-            <a:r>
-              <a:rPr lang="ru-RU" sz="2000" dirty="0"/>
-              <a:t>Суть задания: разделение визуальной информации на яркостную составляющую </a:t>
-            </a:r>
-            <a:r>
-              <a:rPr lang="en-US" sz="2000" dirty="0"/>
-              <a:t>(Y) </a:t>
-            </a:r>
-            <a:r>
-              <a:rPr lang="ru-RU" sz="2000" dirty="0"/>
-              <a:t>и две цветоразностные </a:t>
-            </a:r>
-            <a:r>
-              <a:rPr lang="en-US" sz="2000" dirty="0"/>
-              <a:t>(Cr, </a:t>
-            </a:r>
-            <a:r>
-              <a:rPr lang="en-US" sz="2000" dirty="0" err="1"/>
-              <a:t>Cb</a:t>
-            </a:r>
-            <a:r>
-              <a:rPr lang="en-US" sz="2000" dirty="0"/>
-              <a:t>)</a:t>
-            </a:r>
-            <a:endParaRPr lang="ru-RU" sz="2000" dirty="0"/>
-          </a:p>
-        </p:txBody>
-      </p:sp>
+            <a:pPr algn="ctr"/>
+            <a:r>
+              <a:rPr lang="ru-RU" b="1" dirty="0"/>
+              <a:t>Терминал:</a:t>
+            </a:r>
+          </a:p>
+        </p:txBody>
+      </p:sp>
+      <p:pic>
+        <p:nvPicPr>
+          <p:cNvPr id="13" name="Рисунок 12">
+            <a:extLst>
+              <a:ext uri="{FF2B5EF4-FFF2-40B4-BE49-F238E27FC236}">
+                <a16:creationId xmlns:a16="http://schemas.microsoft.com/office/drawing/2014/main" id="{14C42DD7-4A1B-907C-90BC-805F77349DA1}"/>
+              </a:ext>
+            </a:extLst>
+          </p:cNvPr>
+          <p:cNvPicPr>
+            <a:picLocks noChangeAspect="1"/>
+          </p:cNvPicPr>
+          <p:nvPr/>
+        </p:nvPicPr>
+        <p:blipFill>
+          <a:blip r:embed="rId4"/>
+          <a:stretch>
+            <a:fillRect/>
+          </a:stretch>
+        </p:blipFill>
+        <p:spPr>
+          <a:xfrm>
+            <a:off x="6084868" y="3070225"/>
+            <a:ext cx="4583132" cy="3238500"/>
+          </a:xfrm>
+          <a:prstGeom prst="rect">
+            <a:avLst/>
+          </a:prstGeom>
+        </p:spPr>
+      </p:pic>
       <p:sp>
         <p:nvSpPr>
           <p:cNvPr id="14" name="Номер слайда 13">
             <a:extLst>
               <a:ext uri="{FF2B5EF4-FFF2-40B4-BE49-F238E27FC236}">
-                <a16:creationId xmlns:a16="http://schemas.microsoft.com/office/drawing/2014/main" id="{684D501B-E133-D9A8-6B7A-D563CF6B5219}"/>
+                <a16:creationId xmlns:a16="http://schemas.microsoft.com/office/drawing/2014/main" id="{E68AB01A-8F4E-E197-5EE4-ADA4BA8CC9A1}"/>
               </a:ext>
             </a:extLst>
           </p:cNvPr>
@@ -7270,7 +7488,7 @@
     </p:spTree>
     <p:extLst>
       <p:ext uri="{BB962C8B-B14F-4D97-AF65-F5344CB8AC3E}">
-        <p14:creationId xmlns:p14="http://schemas.microsoft.com/office/powerpoint/2010/main" val="3690317432"/>
+        <p14:creationId xmlns:p14="http://schemas.microsoft.com/office/powerpoint/2010/main" val="2412595500"/>
       </p:ext>
     </p:extLst>
   </p:cSld>
@@ -7299,10 +7517,10 @@
       </p:grpSpPr>
       <p:sp>
         <p:nvSpPr>
-          <p:cNvPr id="20" name="TextBox 19">
-            <a:extLst>
-              <a:ext uri="{FF2B5EF4-FFF2-40B4-BE49-F238E27FC236}">
-                <a16:creationId xmlns:a16="http://schemas.microsoft.com/office/drawing/2014/main" id="{71F5B869-FCA3-91D3-678D-F5E5BE3D9772}"/>
+          <p:cNvPr id="5" name="TextBox 4">
+            <a:extLst>
+              <a:ext uri="{FF2B5EF4-FFF2-40B4-BE49-F238E27FC236}">
+                <a16:creationId xmlns:a16="http://schemas.microsoft.com/office/drawing/2014/main" id="{B41B6E55-C1E7-22C7-FFCB-604BB72C480D}"/>
               </a:ext>
             </a:extLst>
           </p:cNvPr>
@@ -7311,8 +7529,8 @@
         </p:nvSpPr>
         <p:spPr>
           <a:xfrm>
-            <a:off x="1489610" y="1747042"/>
-            <a:ext cx="9212779" cy="707886"/>
+            <a:off x="1482190" y="549275"/>
+            <a:ext cx="9185810" cy="954107"/>
           </a:xfrm>
           <a:prstGeom prst="rect">
             <a:avLst/>
@@ -7326,30 +7544,23 @@
           <a:lstStyle/>
           <a:p>
             <a:r>
-              <a:rPr lang="ru-RU" sz="2000" dirty="0"/>
-              <a:t>Суть задания: разделение визуальной информации на яркостную составляющую </a:t>
-            </a:r>
-            <a:r>
-              <a:rPr lang="en-US" sz="2000" dirty="0"/>
-              <a:t>(Y) </a:t>
-            </a:r>
-            <a:r>
-              <a:rPr lang="ru-RU" sz="2000" dirty="0"/>
-              <a:t>и две цветоразностные </a:t>
-            </a:r>
-            <a:r>
-              <a:rPr lang="en-US" sz="2000" dirty="0"/>
-              <a:t>(Cr, </a:t>
-            </a:r>
-            <a:r>
-              <a:rPr lang="en-US" sz="2000" dirty="0" err="1"/>
-              <a:t>Cb</a:t>
-            </a:r>
-            <a:r>
-              <a:rPr lang="en-US" sz="2000" dirty="0"/>
-              <a:t>)</a:t>
-            </a:r>
-            <a:endParaRPr lang="ru-RU" sz="2000" dirty="0"/>
+              <a:rPr lang="ru-RU" sz="2800" b="1" dirty="0">
+                <a:latin typeface="+mj-lt"/>
+              </a:rPr>
+              <a:t>Задание 3. Преобразовать изображение в </a:t>
+            </a:r>
+            <a:r>
+              <a:rPr lang="ru-RU" sz="2800" b="1" dirty="0" err="1">
+                <a:latin typeface="+mj-lt"/>
+              </a:rPr>
+              <a:t>YCrCb</a:t>
+            </a:r>
+            <a:r>
+              <a:rPr lang="ru-RU" sz="2800" b="1" dirty="0">
+                <a:latin typeface="+mj-lt"/>
+              </a:rPr>
+              <a:t> и вывести отдельные каналы</a:t>
+            </a:r>
           </a:p>
         </p:txBody>
       </p:sp>
@@ -7368,7 +7579,7 @@
         <p:spPr>
           <a:xfrm>
             <a:off x="1485900" y="2700893"/>
-            <a:ext cx="4172215" cy="369332"/>
+            <a:ext cx="4173803" cy="369332"/>
           </a:xfrm>
           <a:prstGeom prst="rect">
             <a:avLst/>
@@ -7441,12 +7652,12 @@
         </p:nvPicPr>
         <p:blipFill>
           <a:blip r:embed="rId2"/>
-          <a:srcRect l="34694" r="34663"/>
+          <a:srcRect r="69357"/>
           <a:stretch/>
         </p:blipFill>
         <p:spPr>
           <a:xfrm>
-            <a:off x="6096001" y="3066902"/>
+            <a:off x="6095999" y="3066902"/>
             <a:ext cx="4572000" cy="3241823"/>
           </a:xfrm>
           <a:prstGeom prst="rect">
@@ -7456,10 +7667,10 @@
       </p:pic>
       <p:pic>
         <p:nvPicPr>
-          <p:cNvPr id="3" name="Рисунок 2">
-            <a:extLst>
-              <a:ext uri="{FF2B5EF4-FFF2-40B4-BE49-F238E27FC236}">
-                <a16:creationId xmlns:a16="http://schemas.microsoft.com/office/drawing/2014/main" id="{BF619218-ACB6-C2D4-CBA2-18ACD378B153}"/>
+          <p:cNvPr id="10" name="Рисунок 9">
+            <a:extLst>
+              <a:ext uri="{FF2B5EF4-FFF2-40B4-BE49-F238E27FC236}">
+                <a16:creationId xmlns:a16="http://schemas.microsoft.com/office/drawing/2014/main" id="{47E70602-039E-5B0E-9198-712C025B25CB}"/>
               </a:ext>
             </a:extLst>
           </p:cNvPr>
@@ -7486,10 +7697,10 @@
       </p:pic>
       <p:sp>
         <p:nvSpPr>
-          <p:cNvPr id="4" name="TextBox 3">
-            <a:extLst>
-              <a:ext uri="{FF2B5EF4-FFF2-40B4-BE49-F238E27FC236}">
-                <a16:creationId xmlns:a16="http://schemas.microsoft.com/office/drawing/2014/main" id="{32A0700A-D1A3-CABA-8257-0049F29CEB91}"/>
+          <p:cNvPr id="12" name="TextBox 11">
+            <a:extLst>
+              <a:ext uri="{FF2B5EF4-FFF2-40B4-BE49-F238E27FC236}">
+                <a16:creationId xmlns:a16="http://schemas.microsoft.com/office/drawing/2014/main" id="{5E081176-D1EE-00B4-D512-DF4558557F77}"/>
               </a:ext>
             </a:extLst>
           </p:cNvPr>
@@ -7498,8 +7709,8 @@
         </p:nvSpPr>
         <p:spPr>
           <a:xfrm>
-            <a:off x="1482190" y="549275"/>
-            <a:ext cx="9185810" cy="954107"/>
+            <a:off x="1489610" y="1747042"/>
+            <a:ext cx="9212779" cy="707886"/>
           </a:xfrm>
           <a:prstGeom prst="rect">
             <a:avLst/>
@@ -7513,32 +7724,39 @@
           <a:lstStyle/>
           <a:p>
             <a:r>
-              <a:rPr lang="ru-RU" sz="2800" b="1" dirty="0">
-                <a:latin typeface="+mj-lt"/>
-              </a:rPr>
-              <a:t>Задание 3. Преобразовать изображение в </a:t>
-            </a:r>
-            <a:r>
-              <a:rPr lang="ru-RU" sz="2800" b="1" dirty="0" err="1">
-                <a:latin typeface="+mj-lt"/>
-              </a:rPr>
-              <a:t>YCrCb</a:t>
-            </a:r>
-            <a:r>
-              <a:rPr lang="ru-RU" sz="2800" b="1" dirty="0">
-                <a:latin typeface="+mj-lt"/>
-              </a:rPr>
-              <a:t> и вывести отдельные каналы</a:t>
-            </a:r>
-          </a:p>
-        </p:txBody>
-      </p:sp>
-      <p:sp>
-        <p:nvSpPr>
-          <p:cNvPr id="6" name="Номер слайда 5">
-            <a:extLst>
-              <a:ext uri="{FF2B5EF4-FFF2-40B4-BE49-F238E27FC236}">
-                <a16:creationId xmlns:a16="http://schemas.microsoft.com/office/drawing/2014/main" id="{06D7BD2D-450B-9072-1CC3-235F616A2D19}"/>
+              <a:rPr lang="ru-RU" sz="2000" dirty="0"/>
+              <a:t>Суть задания: разделение визуальной информации на яркостную составляющую </a:t>
+            </a:r>
+            <a:r>
+              <a:rPr lang="en-US" sz="2000" dirty="0"/>
+              <a:t>(Y) </a:t>
+            </a:r>
+            <a:r>
+              <a:rPr lang="ru-RU" sz="2000" dirty="0"/>
+              <a:t>и две цветоразностные </a:t>
+            </a:r>
+            <a:r>
+              <a:rPr lang="en-US" sz="2000" dirty="0"/>
+              <a:t>(Cr, </a:t>
+            </a:r>
+            <a:r>
+              <a:rPr lang="en-US" sz="2000" dirty="0" err="1"/>
+              <a:t>Cb</a:t>
+            </a:r>
+            <a:r>
+              <a:rPr lang="en-US" sz="2000" dirty="0"/>
+              <a:t>)</a:t>
+            </a:r>
+            <a:endParaRPr lang="ru-RU" sz="2000" dirty="0"/>
+          </a:p>
+        </p:txBody>
+      </p:sp>
+      <p:sp>
+        <p:nvSpPr>
+          <p:cNvPr id="14" name="Номер слайда 13">
+            <a:extLst>
+              <a:ext uri="{FF2B5EF4-FFF2-40B4-BE49-F238E27FC236}">
+                <a16:creationId xmlns:a16="http://schemas.microsoft.com/office/drawing/2014/main" id="{684D501B-E133-D9A8-6B7A-D563CF6B5219}"/>
               </a:ext>
             </a:extLst>
           </p:cNvPr>
@@ -7554,35 +7772,24 @@
           <a:bodyPr/>
           <a:lstStyle/>
           <a:p>
-            <a:r>
-              <a:rPr lang="ru-RU" dirty="0"/>
-              <a:t>4</a:t>
-            </a:r>
+            <a:fld id="{89A371D6-626E-4711-87E0-599E0F8A4C97}" type="slidenum">
+              <a:rPr lang="ru-RU" smtClean="0"/>
+              <a:t>5</a:t>
+            </a:fld>
+            <a:endParaRPr lang="ru-RU"/>
           </a:p>
         </p:txBody>
       </p:sp>
     </p:spTree>
     <p:extLst>
       <p:ext uri="{BB962C8B-B14F-4D97-AF65-F5344CB8AC3E}">
-        <p14:creationId xmlns:p14="http://schemas.microsoft.com/office/powerpoint/2010/main" val="2105614118"/>
+        <p14:creationId xmlns:p14="http://schemas.microsoft.com/office/powerpoint/2010/main" val="3690317432"/>
       </p:ext>
     </p:extLst>
   </p:cSld>
   <p:clrMapOvr>
     <a:masterClrMapping/>
   </p:clrMapOvr>
-  <mc:AlternateContent xmlns:mc="http://schemas.openxmlformats.org/markup-compatibility/2006" xmlns:p14="http://schemas.microsoft.com/office/powerpoint/2010/main">
-    <mc:Choice Requires="p14">
-      <p:transition spd="med" p14:dur="700">
-        <p:fade/>
-      </p:transition>
-    </mc:Choice>
-    <mc:Fallback xmlns="">
-      <p:transition spd="med">
-        <p:fade/>
-      </p:transition>
-    </mc:Fallback>
-  </mc:AlternateContent>
 </p:sld>
 </file>
 
@@ -7605,10 +7812,10 @@
       </p:grpSpPr>
       <p:sp>
         <p:nvSpPr>
-          <p:cNvPr id="21" name="TextBox 20">
-            <a:extLst>
-              <a:ext uri="{FF2B5EF4-FFF2-40B4-BE49-F238E27FC236}">
-                <a16:creationId xmlns:a16="http://schemas.microsoft.com/office/drawing/2014/main" id="{0C569071-A5F8-E7C9-1DC2-DF3EA9F88597}"/>
+          <p:cNvPr id="20" name="TextBox 19">
+            <a:extLst>
+              <a:ext uri="{FF2B5EF4-FFF2-40B4-BE49-F238E27FC236}">
+                <a16:creationId xmlns:a16="http://schemas.microsoft.com/office/drawing/2014/main" id="{71F5B869-FCA3-91D3-678D-F5E5BE3D9772}"/>
               </a:ext>
             </a:extLst>
           </p:cNvPr>
@@ -7617,8 +7824,8 @@
         </p:nvSpPr>
         <p:spPr>
           <a:xfrm>
-            <a:off x="1485900" y="2700893"/>
-            <a:ext cx="4172215" cy="369332"/>
+            <a:off x="1489610" y="1747042"/>
+            <a:ext cx="9212779" cy="707886"/>
           </a:xfrm>
           <a:prstGeom prst="rect">
             <a:avLst/>
@@ -7631,20 +7838,40 @@
           </a:bodyPr>
           <a:lstStyle/>
           <a:p>
-            <a:pPr algn="ctr"/>
-            <a:r>
-              <a:rPr lang="ru-RU" b="1" dirty="0"/>
-              <a:t>Код:</a:t>
-            </a:r>
-          </a:p>
-        </p:txBody>
-      </p:sp>
-      <p:sp>
-        <p:nvSpPr>
-          <p:cNvPr id="28" name="TextBox 27">
-            <a:extLst>
-              <a:ext uri="{FF2B5EF4-FFF2-40B4-BE49-F238E27FC236}">
-                <a16:creationId xmlns:a16="http://schemas.microsoft.com/office/drawing/2014/main" id="{7652C659-39B1-B693-6C90-EC889EECEA23}"/>
+            <a:r>
+              <a:rPr lang="ru-RU" sz="2000" dirty="0"/>
+              <a:t>Суть задания: разделение визуальной информации на яркостную составляющую </a:t>
+            </a:r>
+            <a:r>
+              <a:rPr lang="en-US" sz="2000" dirty="0"/>
+              <a:t>(Y) </a:t>
+            </a:r>
+            <a:r>
+              <a:rPr lang="ru-RU" sz="2000" dirty="0"/>
+              <a:t>и две цветоразностные </a:t>
+            </a:r>
+            <a:r>
+              <a:rPr lang="en-US" sz="2000" dirty="0"/>
+              <a:t>(Cr, </a:t>
+            </a:r>
+            <a:r>
+              <a:rPr lang="en-US" sz="2000" dirty="0" err="1"/>
+              <a:t>Cb</a:t>
+            </a:r>
+            <a:r>
+              <a:rPr lang="en-US" sz="2000" dirty="0"/>
+              <a:t>)</a:t>
+            </a:r>
+            <a:endParaRPr lang="ru-RU" sz="2000" dirty="0"/>
+          </a:p>
+        </p:txBody>
+      </p:sp>
+      <p:sp>
+        <p:nvSpPr>
+          <p:cNvPr id="21" name="TextBox 20">
+            <a:extLst>
+              <a:ext uri="{FF2B5EF4-FFF2-40B4-BE49-F238E27FC236}">
+                <a16:creationId xmlns:a16="http://schemas.microsoft.com/office/drawing/2014/main" id="{0C569071-A5F8-E7C9-1DC2-DF3EA9F88597}"/>
               </a:ext>
             </a:extLst>
           </p:cNvPr>
@@ -7653,8 +7880,8 @@
         </p:nvSpPr>
         <p:spPr>
           <a:xfrm>
-            <a:off x="6057900" y="2703199"/>
-            <a:ext cx="4610100" cy="369332"/>
+            <a:off x="1485900" y="2700893"/>
+            <a:ext cx="4172215" cy="369332"/>
           </a:xfrm>
           <a:prstGeom prst="rect">
             <a:avLst/>
@@ -7670,6 +7897,42 @@
             <a:pPr algn="ctr"/>
             <a:r>
               <a:rPr lang="ru-RU" b="1" dirty="0"/>
+              <a:t>Код:</a:t>
+            </a:r>
+          </a:p>
+        </p:txBody>
+      </p:sp>
+      <p:sp>
+        <p:nvSpPr>
+          <p:cNvPr id="28" name="TextBox 27">
+            <a:extLst>
+              <a:ext uri="{FF2B5EF4-FFF2-40B4-BE49-F238E27FC236}">
+                <a16:creationId xmlns:a16="http://schemas.microsoft.com/office/drawing/2014/main" id="{7652C659-39B1-B693-6C90-EC889EECEA23}"/>
+              </a:ext>
+            </a:extLst>
+          </p:cNvPr>
+          <p:cNvSpPr txBox="1"/>
+          <p:nvPr/>
+        </p:nvSpPr>
+        <p:spPr>
+          <a:xfrm>
+            <a:off x="6057900" y="2703199"/>
+            <a:ext cx="4610100" cy="369332"/>
+          </a:xfrm>
+          <a:prstGeom prst="rect">
+            <a:avLst/>
+          </a:prstGeom>
+          <a:noFill/>
+        </p:spPr>
+        <p:txBody>
+          <a:bodyPr wrap="square" rtlCol="0" anchor="ctr">
+            <a:spAutoFit/>
+          </a:bodyPr>
+          <a:lstStyle/>
+          <a:p>
+            <a:pPr algn="ctr"/>
+            <a:r>
+              <a:rPr lang="ru-RU" b="1" dirty="0"/>
               <a:t>Вывод:</a:t>
             </a:r>
           </a:p>
@@ -7691,7 +7954,7 @@
         </p:nvPicPr>
         <p:blipFill>
           <a:blip r:embed="rId2"/>
-          <a:srcRect l="69357"/>
+          <a:srcRect l="34694" r="34663"/>
           <a:stretch/>
         </p:blipFill>
         <p:spPr>
@@ -7706,10 +7969,10 @@
       </p:pic>
       <p:pic>
         <p:nvPicPr>
-          <p:cNvPr id="4" name="Рисунок 3">
-            <a:extLst>
-              <a:ext uri="{FF2B5EF4-FFF2-40B4-BE49-F238E27FC236}">
-                <a16:creationId xmlns:a16="http://schemas.microsoft.com/office/drawing/2014/main" id="{E62A65E3-D5D4-3AF9-E35A-543011D05E3D}"/>
+          <p:cNvPr id="3" name="Рисунок 2">
+            <a:extLst>
+              <a:ext uri="{FF2B5EF4-FFF2-40B4-BE49-F238E27FC236}">
+                <a16:creationId xmlns:a16="http://schemas.microsoft.com/office/drawing/2014/main" id="{BF619218-ACB6-C2D4-CBA2-18ACD378B153}"/>
               </a:ext>
             </a:extLst>
           </p:cNvPr>
@@ -7727,7 +7990,7 @@
         <p:spPr>
           <a:xfrm>
             <a:off x="1487488" y="3066902"/>
-            <a:ext cx="4170627" cy="3241823"/>
+            <a:ext cx="4172215" cy="3241823"/>
           </a:xfrm>
           <a:prstGeom prst="rect">
             <a:avLst/>
@@ -7736,10 +7999,10 @@
       </p:pic>
       <p:sp>
         <p:nvSpPr>
-          <p:cNvPr id="6" name="TextBox 5">
-            <a:extLst>
-              <a:ext uri="{FF2B5EF4-FFF2-40B4-BE49-F238E27FC236}">
-                <a16:creationId xmlns:a16="http://schemas.microsoft.com/office/drawing/2014/main" id="{21717830-3824-984A-0FE8-3764A8CCF5E4}"/>
+          <p:cNvPr id="4" name="TextBox 3">
+            <a:extLst>
+              <a:ext uri="{FF2B5EF4-FFF2-40B4-BE49-F238E27FC236}">
+                <a16:creationId xmlns:a16="http://schemas.microsoft.com/office/drawing/2014/main" id="{32A0700A-D1A3-CABA-8257-0049F29CEB91}"/>
               </a:ext>
             </a:extLst>
           </p:cNvPr>
@@ -7785,66 +8048,10 @@
       </p:sp>
       <p:sp>
         <p:nvSpPr>
-          <p:cNvPr id="8" name="TextBox 7">
-            <a:extLst>
-              <a:ext uri="{FF2B5EF4-FFF2-40B4-BE49-F238E27FC236}">
-                <a16:creationId xmlns:a16="http://schemas.microsoft.com/office/drawing/2014/main" id="{49F1F59B-B0EE-8AD8-BE35-7EF5C2451747}"/>
-              </a:ext>
-            </a:extLst>
-          </p:cNvPr>
-          <p:cNvSpPr txBox="1"/>
-          <p:nvPr/>
-        </p:nvSpPr>
-        <p:spPr>
-          <a:xfrm>
-            <a:off x="1489610" y="1747042"/>
-            <a:ext cx="9212779" cy="707886"/>
-          </a:xfrm>
-          <a:prstGeom prst="rect">
-            <a:avLst/>
-          </a:prstGeom>
-          <a:noFill/>
-        </p:spPr>
-        <p:txBody>
-          <a:bodyPr wrap="square" rtlCol="0" anchor="ctr">
-            <a:spAutoFit/>
-          </a:bodyPr>
-          <a:lstStyle/>
-          <a:p>
-            <a:r>
-              <a:rPr lang="ru-RU" sz="2000" dirty="0"/>
-              <a:t>Суть задания: разделение визуальной информации на яркостную составляющую </a:t>
-            </a:r>
-            <a:r>
-              <a:rPr lang="en-US" sz="2000" dirty="0"/>
-              <a:t>(Y) </a:t>
-            </a:r>
-            <a:r>
-              <a:rPr lang="ru-RU" sz="2000" dirty="0"/>
-              <a:t>и две цветоразностные </a:t>
-            </a:r>
-            <a:r>
-              <a:rPr lang="en-US" sz="2000" dirty="0"/>
-              <a:t>(Cr, </a:t>
-            </a:r>
-            <a:r>
-              <a:rPr lang="en-US" sz="2000" dirty="0" err="1"/>
-              <a:t>Cb</a:t>
-            </a:r>
-            <a:r>
-              <a:rPr lang="en-US" sz="2000" dirty="0"/>
-              <a:t>)</a:t>
-            </a:r>
-            <a:endParaRPr lang="ru-RU" sz="2000" dirty="0"/>
-          </a:p>
-        </p:txBody>
-      </p:sp>
-      <p:sp>
-        <p:nvSpPr>
-          <p:cNvPr id="9" name="Номер слайда 8">
-            <a:extLst>
-              <a:ext uri="{FF2B5EF4-FFF2-40B4-BE49-F238E27FC236}">
-                <a16:creationId xmlns:a16="http://schemas.microsoft.com/office/drawing/2014/main" id="{9F13964B-87DF-AA68-A2E5-441A8684E77F}"/>
+          <p:cNvPr id="6" name="Номер слайда 5">
+            <a:extLst>
+              <a:ext uri="{FF2B5EF4-FFF2-40B4-BE49-F238E27FC236}">
+                <a16:creationId xmlns:a16="http://schemas.microsoft.com/office/drawing/2014/main" id="{06D7BD2D-450B-9072-1CC3-235F616A2D19}"/>
               </a:ext>
             </a:extLst>
           </p:cNvPr>
@@ -7870,7 +8077,7 @@
     </p:spTree>
     <p:extLst>
       <p:ext uri="{BB962C8B-B14F-4D97-AF65-F5344CB8AC3E}">
-        <p14:creationId xmlns:p14="http://schemas.microsoft.com/office/powerpoint/2010/main" val="3293065839"/>
+        <p14:creationId xmlns:p14="http://schemas.microsoft.com/office/powerpoint/2010/main" val="2105614118"/>
       </p:ext>
     </p:extLst>
   </p:cSld>
@@ -7911,10 +8118,10 @@
       </p:grpSpPr>
       <p:sp>
         <p:nvSpPr>
-          <p:cNvPr id="5" name="TextBox 4">
-            <a:extLst>
-              <a:ext uri="{FF2B5EF4-FFF2-40B4-BE49-F238E27FC236}">
-                <a16:creationId xmlns:a16="http://schemas.microsoft.com/office/drawing/2014/main" id="{B41B6E55-C1E7-22C7-FFCB-604BB72C480D}"/>
+          <p:cNvPr id="21" name="TextBox 20">
+            <a:extLst>
+              <a:ext uri="{FF2B5EF4-FFF2-40B4-BE49-F238E27FC236}">
+                <a16:creationId xmlns:a16="http://schemas.microsoft.com/office/drawing/2014/main" id="{0C569071-A5F8-E7C9-1DC2-DF3EA9F88597}"/>
               </a:ext>
             </a:extLst>
           </p:cNvPr>
@@ -7923,8 +8130,8 @@
         </p:nvSpPr>
         <p:spPr>
           <a:xfrm>
-            <a:off x="1485899" y="549275"/>
-            <a:ext cx="9182101" cy="954107"/>
+            <a:off x="1485900" y="2700893"/>
+            <a:ext cx="4172215" cy="369332"/>
           </a:xfrm>
           <a:prstGeom prst="rect">
             <a:avLst/>
@@ -7937,33 +8144,20 @@
           </a:bodyPr>
           <a:lstStyle/>
           <a:p>
-            <a:r>
-              <a:rPr lang="ru-RU" sz="2800" b="1" dirty="0">
-                <a:latin typeface="+mj-lt"/>
-              </a:rPr>
-              <a:t>Задание </a:t>
-            </a:r>
-            <a:r>
-              <a:rPr lang="en-US" sz="2800" b="1" dirty="0">
-                <a:latin typeface="+mj-lt"/>
-              </a:rPr>
-              <a:t>4</a:t>
-            </a:r>
-            <a:r>
-              <a:rPr lang="ru-RU" sz="2800" b="1" dirty="0">
-                <a:latin typeface="+mj-lt"/>
-              </a:rPr>
-              <a:t>. Сделать инверсию цвета (отнять каждый канал от 255) и сохранить</a:t>
-            </a:r>
-          </a:p>
-        </p:txBody>
-      </p:sp>
-      <p:sp>
-        <p:nvSpPr>
-          <p:cNvPr id="20" name="TextBox 19">
-            <a:extLst>
-              <a:ext uri="{FF2B5EF4-FFF2-40B4-BE49-F238E27FC236}">
-                <a16:creationId xmlns:a16="http://schemas.microsoft.com/office/drawing/2014/main" id="{71F5B869-FCA3-91D3-678D-F5E5BE3D9772}"/>
+            <a:pPr algn="ctr"/>
+            <a:r>
+              <a:rPr lang="ru-RU" b="1" dirty="0"/>
+              <a:t>Код:</a:t>
+            </a:r>
+          </a:p>
+        </p:txBody>
+      </p:sp>
+      <p:sp>
+        <p:nvSpPr>
+          <p:cNvPr id="28" name="TextBox 27">
+            <a:extLst>
+              <a:ext uri="{FF2B5EF4-FFF2-40B4-BE49-F238E27FC236}">
+                <a16:creationId xmlns:a16="http://schemas.microsoft.com/office/drawing/2014/main" id="{7652C659-39B1-B693-6C90-EC889EECEA23}"/>
               </a:ext>
             </a:extLst>
           </p:cNvPr>
@@ -7972,8 +8166,8 @@
         </p:nvSpPr>
         <p:spPr>
           <a:xfrm>
-            <a:off x="1485898" y="1748194"/>
-            <a:ext cx="9182101" cy="707886"/>
+            <a:off x="6057900" y="2703199"/>
+            <a:ext cx="4610100" cy="369332"/>
           </a:xfrm>
           <a:prstGeom prst="rect">
             <a:avLst/>
@@ -7986,77 +8180,6 @@
           </a:bodyPr>
           <a:lstStyle/>
           <a:p>
-            <a:r>
-              <a:rPr lang="ru-RU" sz="2000" dirty="0"/>
-              <a:t>Суть задания: базовая арифметика над пикселями для создания эффекта фотонегатива с последующей записью результата в файл</a:t>
-            </a:r>
-          </a:p>
-        </p:txBody>
-      </p:sp>
-      <p:sp>
-        <p:nvSpPr>
-          <p:cNvPr id="21" name="TextBox 20">
-            <a:extLst>
-              <a:ext uri="{FF2B5EF4-FFF2-40B4-BE49-F238E27FC236}">
-                <a16:creationId xmlns:a16="http://schemas.microsoft.com/office/drawing/2014/main" id="{0C569071-A5F8-E7C9-1DC2-DF3EA9F88597}"/>
-              </a:ext>
-            </a:extLst>
-          </p:cNvPr>
-          <p:cNvSpPr txBox="1"/>
-          <p:nvPr/>
-        </p:nvSpPr>
-        <p:spPr>
-          <a:xfrm>
-            <a:off x="1493321" y="2700893"/>
-            <a:ext cx="4203831" cy="369332"/>
-          </a:xfrm>
-          <a:prstGeom prst="rect">
-            <a:avLst/>
-          </a:prstGeom>
-          <a:noFill/>
-        </p:spPr>
-        <p:txBody>
-          <a:bodyPr wrap="square" rtlCol="0" anchor="ctr">
-            <a:spAutoFit/>
-          </a:bodyPr>
-          <a:lstStyle/>
-          <a:p>
-            <a:pPr algn="ctr"/>
-            <a:r>
-              <a:rPr lang="ru-RU" b="1" dirty="0"/>
-              <a:t>Код:</a:t>
-            </a:r>
-          </a:p>
-        </p:txBody>
-      </p:sp>
-      <p:sp>
-        <p:nvSpPr>
-          <p:cNvPr id="28" name="TextBox 27">
-            <a:extLst>
-              <a:ext uri="{FF2B5EF4-FFF2-40B4-BE49-F238E27FC236}">
-                <a16:creationId xmlns:a16="http://schemas.microsoft.com/office/drawing/2014/main" id="{7652C659-39B1-B693-6C90-EC889EECEA23}"/>
-              </a:ext>
-            </a:extLst>
-          </p:cNvPr>
-          <p:cNvSpPr txBox="1"/>
-          <p:nvPr/>
-        </p:nvSpPr>
-        <p:spPr>
-          <a:xfrm>
-            <a:off x="6088579" y="2700893"/>
-            <a:ext cx="4579421" cy="369332"/>
-          </a:xfrm>
-          <a:prstGeom prst="rect">
-            <a:avLst/>
-          </a:prstGeom>
-          <a:noFill/>
-        </p:spPr>
-        <p:txBody>
-          <a:bodyPr wrap="square" rtlCol="0" anchor="ctr">
-            <a:spAutoFit/>
-          </a:bodyPr>
-          <a:lstStyle/>
-          <a:p>
             <a:pPr algn="ctr"/>
             <a:r>
               <a:rPr lang="ru-RU" b="1" dirty="0"/>
@@ -8067,10 +8190,10 @@
       </p:sp>
       <p:pic>
         <p:nvPicPr>
-          <p:cNvPr id="3" name="Рисунок 2">
-            <a:extLst>
-              <a:ext uri="{FF2B5EF4-FFF2-40B4-BE49-F238E27FC236}">
-                <a16:creationId xmlns:a16="http://schemas.microsoft.com/office/drawing/2014/main" id="{B0D62C63-7E4A-DB3A-D1DA-6C1F67A82D22}"/>
+          <p:cNvPr id="7" name="Рисунок 6">
+            <a:extLst>
+              <a:ext uri="{FF2B5EF4-FFF2-40B4-BE49-F238E27FC236}">
+                <a16:creationId xmlns:a16="http://schemas.microsoft.com/office/drawing/2014/main" id="{C113972E-B628-2140-FDB2-37D962BD4600}"/>
               </a:ext>
             </a:extLst>
           </p:cNvPr>
@@ -8081,62 +8204,25 @@
         </p:nvPicPr>
         <p:blipFill>
           <a:blip r:embed="rId2"/>
-          <a:stretch>
-            <a:fillRect/>
-          </a:stretch>
+          <a:srcRect l="69357"/>
+          <a:stretch/>
         </p:blipFill>
         <p:spPr>
           <a:xfrm>
-            <a:off x="1493321" y="3070225"/>
-            <a:ext cx="4198626" cy="2057401"/>
+            <a:off x="6096001" y="3066902"/>
+            <a:ext cx="4572000" cy="3241823"/>
           </a:xfrm>
           <a:prstGeom prst="rect">
             <a:avLst/>
           </a:prstGeom>
         </p:spPr>
       </p:pic>
-      <p:sp>
-        <p:nvSpPr>
-          <p:cNvPr id="7" name="TextBox 6">
-            <a:extLst>
-              <a:ext uri="{FF2B5EF4-FFF2-40B4-BE49-F238E27FC236}">
-                <a16:creationId xmlns:a16="http://schemas.microsoft.com/office/drawing/2014/main" id="{F1BAFD52-FD1D-DE60-1127-6A92B33A0DC3}"/>
-              </a:ext>
-            </a:extLst>
-          </p:cNvPr>
-          <p:cNvSpPr txBox="1"/>
-          <p:nvPr/>
-        </p:nvSpPr>
-        <p:spPr>
-          <a:xfrm>
-            <a:off x="1487924" y="5127626"/>
-            <a:ext cx="4187494" cy="369332"/>
-          </a:xfrm>
-          <a:prstGeom prst="rect">
-            <a:avLst/>
-          </a:prstGeom>
-          <a:noFill/>
-        </p:spPr>
-        <p:txBody>
-          <a:bodyPr wrap="square" rtlCol="0" anchor="ctr">
-            <a:spAutoFit/>
-          </a:bodyPr>
-          <a:lstStyle/>
-          <a:p>
-            <a:pPr algn="ctr"/>
-            <a:r>
-              <a:rPr lang="ru-RU" b="1" dirty="0"/>
-              <a:t>Терминал:</a:t>
-            </a:r>
-          </a:p>
-        </p:txBody>
-      </p:sp>
       <p:pic>
         <p:nvPicPr>
-          <p:cNvPr id="9" name="Рисунок 8">
-            <a:extLst>
-              <a:ext uri="{FF2B5EF4-FFF2-40B4-BE49-F238E27FC236}">
-                <a16:creationId xmlns:a16="http://schemas.microsoft.com/office/drawing/2014/main" id="{C8ED8086-B24C-14DA-63C6-F1AE2A3C7882}"/>
+          <p:cNvPr id="4" name="Рисунок 3">
+            <a:extLst>
+              <a:ext uri="{FF2B5EF4-FFF2-40B4-BE49-F238E27FC236}">
+                <a16:creationId xmlns:a16="http://schemas.microsoft.com/office/drawing/2014/main" id="{E62A65E3-D5D4-3AF9-E35A-543011D05E3D}"/>
               </a:ext>
             </a:extLst>
           </p:cNvPr>
@@ -8153,50 +8239,125 @@
         </p:blipFill>
         <p:spPr>
           <a:xfrm>
-            <a:off x="1482090" y="5496958"/>
-            <a:ext cx="4198627" cy="811767"/>
+            <a:off x="1487488" y="3066902"/>
+            <a:ext cx="4170627" cy="3241823"/>
           </a:xfrm>
           <a:prstGeom prst="rect">
             <a:avLst/>
           </a:prstGeom>
         </p:spPr>
       </p:pic>
-      <p:pic>
-        <p:nvPicPr>
-          <p:cNvPr id="11" name="Рисунок 10">
-            <a:extLst>
-              <a:ext uri="{FF2B5EF4-FFF2-40B4-BE49-F238E27FC236}">
-                <a16:creationId xmlns:a16="http://schemas.microsoft.com/office/drawing/2014/main" id="{4195B9F1-4E12-06B4-9B28-378AFE11982A}"/>
-              </a:ext>
-            </a:extLst>
-          </p:cNvPr>
-          <p:cNvPicPr>
-            <a:picLocks noChangeAspect="1"/>
-          </p:cNvPicPr>
-          <p:nvPr/>
-        </p:nvPicPr>
-        <p:blipFill>
-          <a:blip r:embed="rId4"/>
-          <a:stretch>
-            <a:fillRect/>
-          </a:stretch>
-        </p:blipFill>
-        <p:spPr>
-          <a:xfrm>
-            <a:off x="6095999" y="3070225"/>
-            <a:ext cx="4571999" cy="3238500"/>
-          </a:xfrm>
-          <a:prstGeom prst="rect">
-            <a:avLst/>
-          </a:prstGeom>
-        </p:spPr>
-      </p:pic>
-      <p:sp>
-        <p:nvSpPr>
-          <p:cNvPr id="12" name="Номер слайда 11">
-            <a:extLst>
-              <a:ext uri="{FF2B5EF4-FFF2-40B4-BE49-F238E27FC236}">
-                <a16:creationId xmlns:a16="http://schemas.microsoft.com/office/drawing/2014/main" id="{71994455-97A7-E93D-030B-CD5AE525C802}"/>
+      <p:sp>
+        <p:nvSpPr>
+          <p:cNvPr id="6" name="TextBox 5">
+            <a:extLst>
+              <a:ext uri="{FF2B5EF4-FFF2-40B4-BE49-F238E27FC236}">
+                <a16:creationId xmlns:a16="http://schemas.microsoft.com/office/drawing/2014/main" id="{21717830-3824-984A-0FE8-3764A8CCF5E4}"/>
+              </a:ext>
+            </a:extLst>
+          </p:cNvPr>
+          <p:cNvSpPr txBox="1"/>
+          <p:nvPr/>
+        </p:nvSpPr>
+        <p:spPr>
+          <a:xfrm>
+            <a:off x="1482190" y="549275"/>
+            <a:ext cx="9185810" cy="954107"/>
+          </a:xfrm>
+          <a:prstGeom prst="rect">
+            <a:avLst/>
+          </a:prstGeom>
+          <a:noFill/>
+        </p:spPr>
+        <p:txBody>
+          <a:bodyPr wrap="square" rtlCol="0" anchor="ctr">
+            <a:spAutoFit/>
+          </a:bodyPr>
+          <a:lstStyle/>
+          <a:p>
+            <a:r>
+              <a:rPr lang="ru-RU" sz="2800" b="1" dirty="0">
+                <a:latin typeface="+mj-lt"/>
+              </a:rPr>
+              <a:t>Задание 3. Преобразовать изображение в </a:t>
+            </a:r>
+            <a:r>
+              <a:rPr lang="ru-RU" sz="2800" b="1" dirty="0" err="1">
+                <a:latin typeface="+mj-lt"/>
+              </a:rPr>
+              <a:t>YCrCb</a:t>
+            </a:r>
+            <a:r>
+              <a:rPr lang="ru-RU" sz="2800" b="1" dirty="0">
+                <a:latin typeface="+mj-lt"/>
+              </a:rPr>
+              <a:t> и вывести отдельные каналы</a:t>
+            </a:r>
+          </a:p>
+        </p:txBody>
+      </p:sp>
+      <p:sp>
+        <p:nvSpPr>
+          <p:cNvPr id="8" name="TextBox 7">
+            <a:extLst>
+              <a:ext uri="{FF2B5EF4-FFF2-40B4-BE49-F238E27FC236}">
+                <a16:creationId xmlns:a16="http://schemas.microsoft.com/office/drawing/2014/main" id="{49F1F59B-B0EE-8AD8-BE35-7EF5C2451747}"/>
+              </a:ext>
+            </a:extLst>
+          </p:cNvPr>
+          <p:cNvSpPr txBox="1"/>
+          <p:nvPr/>
+        </p:nvSpPr>
+        <p:spPr>
+          <a:xfrm>
+            <a:off x="1489610" y="1747042"/>
+            <a:ext cx="9212779" cy="707886"/>
+          </a:xfrm>
+          <a:prstGeom prst="rect">
+            <a:avLst/>
+          </a:prstGeom>
+          <a:noFill/>
+        </p:spPr>
+        <p:txBody>
+          <a:bodyPr wrap="square" rtlCol="0" anchor="ctr">
+            <a:spAutoFit/>
+          </a:bodyPr>
+          <a:lstStyle/>
+          <a:p>
+            <a:r>
+              <a:rPr lang="ru-RU" sz="2000" dirty="0"/>
+              <a:t>Суть задания: разделение визуальной информации на яркостную составляющую </a:t>
+            </a:r>
+            <a:r>
+              <a:rPr lang="en-US" sz="2000" dirty="0"/>
+              <a:t>(Y) </a:t>
+            </a:r>
+            <a:r>
+              <a:rPr lang="ru-RU" sz="2000" dirty="0"/>
+              <a:t>и две цветоразностные </a:t>
+            </a:r>
+            <a:r>
+              <a:rPr lang="en-US" sz="2000" dirty="0"/>
+              <a:t>(Cr, </a:t>
+            </a:r>
+            <a:r>
+              <a:rPr lang="en-US" sz="2000" dirty="0" err="1"/>
+              <a:t>Cb</a:t>
+            </a:r>
+            <a:r>
+              <a:rPr lang="en-US" sz="2000" dirty="0"/>
+              <a:t>)</a:t>
+            </a:r>
+            <a:endParaRPr lang="ru-RU" sz="2000" dirty="0"/>
+          </a:p>
+        </p:txBody>
+      </p:sp>
+      <p:sp>
+        <p:nvSpPr>
+          <p:cNvPr id="9" name="Номер слайда 8">
+            <a:extLst>
+              <a:ext uri="{FF2B5EF4-FFF2-40B4-BE49-F238E27FC236}">
+                <a16:creationId xmlns:a16="http://schemas.microsoft.com/office/drawing/2014/main" id="{9F13964B-87DF-AA68-A2E5-441A8684E77F}"/>
               </a:ext>
             </a:extLst>
           </p:cNvPr>
@@ -8214,7 +8375,7 @@
           <a:p>
             <a:r>
               <a:rPr lang="ru-RU" dirty="0"/>
-              <a:t>5</a:t>
+              <a:t>4</a:t>
             </a:r>
           </a:p>
         </p:txBody>
@@ -8222,13 +8383,25 @@
     </p:spTree>
     <p:extLst>
       <p:ext uri="{BB962C8B-B14F-4D97-AF65-F5344CB8AC3E}">
-        <p14:creationId xmlns:p14="http://schemas.microsoft.com/office/powerpoint/2010/main" val="3524718972"/>
+        <p14:creationId xmlns:p14="http://schemas.microsoft.com/office/powerpoint/2010/main" val="3293065839"/>
       </p:ext>
     </p:extLst>
   </p:cSld>
   <p:clrMapOvr>
     <a:masterClrMapping/>
   </p:clrMapOvr>
+  <mc:AlternateContent xmlns:mc="http://schemas.openxmlformats.org/markup-compatibility/2006" xmlns:p14="http://schemas.microsoft.com/office/powerpoint/2010/main">
+    <mc:Choice Requires="p14">
+      <p:transition spd="med" p14:dur="700">
+        <p:fade/>
+      </p:transition>
+    </mc:Choice>
+    <mc:Fallback xmlns="">
+      <p:transition spd="med">
+        <p:fade/>
+      </p:transition>
+    </mc:Fallback>
+  </mc:AlternateContent>
 </p:sld>
 </file>
 
@@ -8281,7 +8454,19 @@
               <a:rPr lang="ru-RU" sz="2800" b="1" dirty="0">
                 <a:latin typeface="+mj-lt"/>
               </a:rPr>
-              <a:t>Задание 5. Нарисовать прямоугольник на изображении красного цвета вокруг центральной области</a:t>
+              <a:t>Задание </a:t>
+            </a:r>
+            <a:r>
+              <a:rPr lang="en-US" sz="2800" b="1" dirty="0">
+                <a:latin typeface="+mj-lt"/>
+              </a:rPr>
+              <a:t>4</a:t>
+            </a:r>
+            <a:r>
+              <a:rPr lang="ru-RU" sz="2800" b="1" dirty="0">
+                <a:latin typeface="+mj-lt"/>
+              </a:rPr>
+              <a:t>. Сделать инверсию цвета (отнять каждый канал от 255) и сохранить</a:t>
             </a:r>
           </a:p>
         </p:txBody>
@@ -8316,7 +8501,7 @@
           <a:p>
             <a:r>
               <a:rPr lang="ru-RU" sz="2000" dirty="0"/>
-              <a:t>Суть задания: создание базовой фигуры поверх изображения, чтобы визуально выделить нужный объект или зону в кадре</a:t>
+              <a:t>Суть задания: базовая арифметика над пикселями для создания эффекта фотонегатива с последующей записью результата в файл</a:t>
             </a:r>
           </a:p>
         </p:txBody>
@@ -8371,8 +8556,8 @@
         </p:nvSpPr>
         <p:spPr>
           <a:xfrm>
-            <a:off x="6095999" y="2700893"/>
-            <a:ext cx="4572001" cy="369332"/>
+            <a:off x="6088579" y="2700893"/>
+            <a:ext cx="4579421" cy="369332"/>
           </a:xfrm>
           <a:prstGeom prst="rect">
             <a:avLst/>
@@ -8395,10 +8580,10 @@
       </p:sp>
       <p:pic>
         <p:nvPicPr>
-          <p:cNvPr id="4" name="Рисунок 3">
-            <a:extLst>
-              <a:ext uri="{FF2B5EF4-FFF2-40B4-BE49-F238E27FC236}">
-                <a16:creationId xmlns:a16="http://schemas.microsoft.com/office/drawing/2014/main" id="{8B885C84-0310-1981-BE5D-B7D29D815DD6}"/>
+          <p:cNvPr id="3" name="Рисунок 2">
+            <a:extLst>
+              <a:ext uri="{FF2B5EF4-FFF2-40B4-BE49-F238E27FC236}">
+                <a16:creationId xmlns:a16="http://schemas.microsoft.com/office/drawing/2014/main" id="{B0D62C63-7E4A-DB3A-D1DA-6C1F67A82D22}"/>
               </a:ext>
             </a:extLst>
           </p:cNvPr>
@@ -8416,19 +8601,55 @@
         <p:spPr>
           <a:xfrm>
             <a:off x="1493321" y="3070225"/>
-            <a:ext cx="4203831" cy="3238500"/>
+            <a:ext cx="4198626" cy="2057401"/>
           </a:xfrm>
           <a:prstGeom prst="rect">
             <a:avLst/>
           </a:prstGeom>
         </p:spPr>
       </p:pic>
+      <p:sp>
+        <p:nvSpPr>
+          <p:cNvPr id="7" name="TextBox 6">
+            <a:extLst>
+              <a:ext uri="{FF2B5EF4-FFF2-40B4-BE49-F238E27FC236}">
+                <a16:creationId xmlns:a16="http://schemas.microsoft.com/office/drawing/2014/main" id="{F1BAFD52-FD1D-DE60-1127-6A92B33A0DC3}"/>
+              </a:ext>
+            </a:extLst>
+          </p:cNvPr>
+          <p:cNvSpPr txBox="1"/>
+          <p:nvPr/>
+        </p:nvSpPr>
+        <p:spPr>
+          <a:xfrm>
+            <a:off x="1487924" y="5127626"/>
+            <a:ext cx="4187494" cy="369332"/>
+          </a:xfrm>
+          <a:prstGeom prst="rect">
+            <a:avLst/>
+          </a:prstGeom>
+          <a:noFill/>
+        </p:spPr>
+        <p:txBody>
+          <a:bodyPr wrap="square" rtlCol="0" anchor="ctr">
+            <a:spAutoFit/>
+          </a:bodyPr>
+          <a:lstStyle/>
+          <a:p>
+            <a:pPr algn="ctr"/>
+            <a:r>
+              <a:rPr lang="ru-RU" b="1" dirty="0"/>
+              <a:t>Терминал:</a:t>
+            </a:r>
+          </a:p>
+        </p:txBody>
+      </p:sp>
       <p:pic>
         <p:nvPicPr>
-          <p:cNvPr id="8" name="Рисунок 7">
-            <a:extLst>
-              <a:ext uri="{FF2B5EF4-FFF2-40B4-BE49-F238E27FC236}">
-                <a16:creationId xmlns:a16="http://schemas.microsoft.com/office/drawing/2014/main" id="{01833D7F-3192-F23D-48D2-6FA718D6B9DE}"/>
+          <p:cNvPr id="9" name="Рисунок 8">
+            <a:extLst>
+              <a:ext uri="{FF2B5EF4-FFF2-40B4-BE49-F238E27FC236}">
+                <a16:creationId xmlns:a16="http://schemas.microsoft.com/office/drawing/2014/main" id="{C8ED8086-B24C-14DA-63C6-F1AE2A3C7882}"/>
               </a:ext>
             </a:extLst>
           </p:cNvPr>
@@ -8445,6 +8666,36 @@
         </p:blipFill>
         <p:spPr>
           <a:xfrm>
+            <a:off x="1482090" y="5496958"/>
+            <a:ext cx="4198627" cy="811767"/>
+          </a:xfrm>
+          <a:prstGeom prst="rect">
+            <a:avLst/>
+          </a:prstGeom>
+        </p:spPr>
+      </p:pic>
+      <p:pic>
+        <p:nvPicPr>
+          <p:cNvPr id="11" name="Рисунок 10">
+            <a:extLst>
+              <a:ext uri="{FF2B5EF4-FFF2-40B4-BE49-F238E27FC236}">
+                <a16:creationId xmlns:a16="http://schemas.microsoft.com/office/drawing/2014/main" id="{4195B9F1-4E12-06B4-9B28-378AFE11982A}"/>
+              </a:ext>
+            </a:extLst>
+          </p:cNvPr>
+          <p:cNvPicPr>
+            <a:picLocks noChangeAspect="1"/>
+          </p:cNvPicPr>
+          <p:nvPr/>
+        </p:nvPicPr>
+        <p:blipFill>
+          <a:blip r:embed="rId4"/>
+          <a:stretch>
+            <a:fillRect/>
+          </a:stretch>
+        </p:blipFill>
+        <p:spPr>
+          <a:xfrm>
             <a:off x="6095999" y="3070225"/>
             <a:ext cx="4571999" cy="3238500"/>
           </a:xfrm>
@@ -8455,10 +8706,10 @@
       </p:pic>
       <p:sp>
         <p:nvSpPr>
-          <p:cNvPr id="10" name="Номер слайда 9">
-            <a:extLst>
-              <a:ext uri="{FF2B5EF4-FFF2-40B4-BE49-F238E27FC236}">
-                <a16:creationId xmlns:a16="http://schemas.microsoft.com/office/drawing/2014/main" id="{5BC0F6DC-C57A-85A1-45B1-DE410A358BB2}"/>
+          <p:cNvPr id="12" name="Номер слайда 11">
+            <a:extLst>
+              <a:ext uri="{FF2B5EF4-FFF2-40B4-BE49-F238E27FC236}">
+                <a16:creationId xmlns:a16="http://schemas.microsoft.com/office/drawing/2014/main" id="{71994455-97A7-E93D-030B-CD5AE525C802}"/>
               </a:ext>
             </a:extLst>
           </p:cNvPr>
@@ -8476,7 +8727,7 @@
           <a:p>
             <a:r>
               <a:rPr lang="ru-RU" dirty="0"/>
-              <a:t>6</a:t>
+              <a:t>5</a:t>
             </a:r>
           </a:p>
         </p:txBody>
@@ -8484,7 +8735,7 @@
     </p:spTree>
     <p:extLst>
       <p:ext uri="{BB962C8B-B14F-4D97-AF65-F5344CB8AC3E}">
-        <p14:creationId xmlns:p14="http://schemas.microsoft.com/office/powerpoint/2010/main" val="4186003422"/>
+        <p14:creationId xmlns:p14="http://schemas.microsoft.com/office/powerpoint/2010/main" val="3524718972"/>
       </p:ext>
     </p:extLst>
   </p:cSld>
@@ -8543,7 +8794,7 @@
               <a:rPr lang="ru-RU" sz="2800" b="1" dirty="0">
                 <a:latin typeface="+mj-lt"/>
               </a:rPr>
-              <a:t>Задание 6. Отразить изображение по горизонтали, по вертикали и по обеим осям сразу</a:t>
+              <a:t>Задание 5. Нарисовать прямоугольник на изображении красного цвета вокруг центральной области</a:t>
             </a:r>
           </a:p>
         </p:txBody>
@@ -8562,8 +8813,8 @@
         </p:nvSpPr>
         <p:spPr>
           <a:xfrm>
-            <a:off x="1485897" y="1594306"/>
-            <a:ext cx="9182101" cy="1015663"/>
+            <a:off x="1485898" y="1748194"/>
+            <a:ext cx="9182101" cy="707886"/>
           </a:xfrm>
           <a:prstGeom prst="rect">
             <a:avLst/>
@@ -8578,7 +8829,7 @@
           <a:p>
             <a:r>
               <a:rPr lang="ru-RU" sz="2000" dirty="0"/>
-              <a:t>Суть задания: зеркальный переворот картинки в разные стороны (вверх ногами, слева направо и наискосок) с помощью изменения порядка строк и столбцов</a:t>
+              <a:t>Суть задания: создание базовой фигуры поверх изображения, чтобы визуально выделить нужный объект или зону в кадре</a:t>
             </a:r>
           </a:p>
         </p:txBody>
@@ -8657,10 +8908,10 @@
       </p:sp>
       <p:pic>
         <p:nvPicPr>
-          <p:cNvPr id="9" name="Рисунок 8">
-            <a:extLst>
-              <a:ext uri="{FF2B5EF4-FFF2-40B4-BE49-F238E27FC236}">
-                <a16:creationId xmlns:a16="http://schemas.microsoft.com/office/drawing/2014/main" id="{A8DB5022-9FD0-6730-BB27-D222EF11023E}"/>
+          <p:cNvPr id="4" name="Рисунок 3">
+            <a:extLst>
+              <a:ext uri="{FF2B5EF4-FFF2-40B4-BE49-F238E27FC236}">
+                <a16:creationId xmlns:a16="http://schemas.microsoft.com/office/drawing/2014/main" id="{8B885C84-0310-1981-BE5D-B7D29D815DD6}"/>
               </a:ext>
             </a:extLst>
           </p:cNvPr>
@@ -8677,8 +8928,8 @@
         </p:blipFill>
         <p:spPr>
           <a:xfrm>
-            <a:off x="1485897" y="3070225"/>
-            <a:ext cx="4211255" cy="3238500"/>
+            <a:off x="1493321" y="3070225"/>
+            <a:ext cx="4203831" cy="3238500"/>
           </a:xfrm>
           <a:prstGeom prst="rect">
             <a:avLst/>
@@ -8687,10 +8938,10 @@
       </p:pic>
       <p:pic>
         <p:nvPicPr>
-          <p:cNvPr id="11" name="Рисунок 10">
-            <a:extLst>
-              <a:ext uri="{FF2B5EF4-FFF2-40B4-BE49-F238E27FC236}">
-                <a16:creationId xmlns:a16="http://schemas.microsoft.com/office/drawing/2014/main" id="{168F4517-3BA1-84B9-B301-FB76E61E6A7E}"/>
+          <p:cNvPr id="8" name="Рисунок 7">
+            <a:extLst>
+              <a:ext uri="{FF2B5EF4-FFF2-40B4-BE49-F238E27FC236}">
+                <a16:creationId xmlns:a16="http://schemas.microsoft.com/office/drawing/2014/main" id="{01833D7F-3192-F23D-48D2-6FA718D6B9DE}"/>
               </a:ext>
             </a:extLst>
           </p:cNvPr>
@@ -8701,8 +8952,9 @@
         </p:nvPicPr>
         <p:blipFill>
           <a:blip r:embed="rId3"/>
-          <a:srcRect r="69447"/>
-          <a:stretch/>
+          <a:stretch>
+            <a:fillRect/>
+          </a:stretch>
         </p:blipFill>
         <p:spPr>
           <a:xfrm>
@@ -8716,10 +8968,10 @@
       </p:pic>
       <p:sp>
         <p:nvSpPr>
-          <p:cNvPr id="12" name="Номер слайда 11">
-            <a:extLst>
-              <a:ext uri="{FF2B5EF4-FFF2-40B4-BE49-F238E27FC236}">
-                <a16:creationId xmlns:a16="http://schemas.microsoft.com/office/drawing/2014/main" id="{F336EB0A-49A1-F94D-4617-C84D35BD1741}"/>
+          <p:cNvPr id="10" name="Номер слайда 9">
+            <a:extLst>
+              <a:ext uri="{FF2B5EF4-FFF2-40B4-BE49-F238E27FC236}">
+                <a16:creationId xmlns:a16="http://schemas.microsoft.com/office/drawing/2014/main" id="{5BC0F6DC-C57A-85A1-45B1-DE410A358BB2}"/>
               </a:ext>
             </a:extLst>
           </p:cNvPr>
@@ -8737,7 +8989,7 @@
           <a:p>
             <a:r>
               <a:rPr lang="ru-RU" dirty="0"/>
-              <a:t>7</a:t>
+              <a:t>6</a:t>
             </a:r>
           </a:p>
         </p:txBody>
@@ -8745,7 +8997,7 @@
     </p:spTree>
     <p:extLst>
       <p:ext uri="{BB962C8B-B14F-4D97-AF65-F5344CB8AC3E}">
-        <p14:creationId xmlns:p14="http://schemas.microsoft.com/office/powerpoint/2010/main" val="3037962077"/>
+        <p14:creationId xmlns:p14="http://schemas.microsoft.com/office/powerpoint/2010/main" val="4186003422"/>
       </p:ext>
     </p:extLst>
   </p:cSld>
